--- a/docs/proposals/presentations/Familiar-Nine-for-colleagues.pptx
+++ b/docs/proposals/presentations/Familiar-Nine-for-colleagues.pptx
@@ -2699,7 +2699,7 @@
                 <a:ea typeface="Inter" pitchFamily="34" charset="-122"/>
                 <a:cs typeface="Inter" pitchFamily="34" charset="-120"/>
               </a:rPr>
-              <a:t>Not part of the contract, same as now — about one Sunday every other working week on the link, exactly today’s share.</a:t>
+              <a:t>Not part of the contract, same as now — one Sunday every other working week, as today (about one more a year each).</a:t>
             </a:r>
             <a:endParaRPr lang="en-US" sz="1300" dirty="0"/>
           </a:p>
@@ -3898,7 +3898,7 @@
                 <a:ea typeface="Inter" pitchFamily="34" charset="-122"/>
                 <a:cs typeface="Inter" pitchFamily="34" charset="-120"/>
               </a:rPr>
-              <a:t>Safer on shift</a:t>
+              <a:t>More colleagues around you</a:t>
             </a:r>
             <a:endParaRPr lang="en-US" sz="3000" dirty="0"/>
           </a:p>
@@ -3937,7 +3937,7 @@
                 <a:ea typeface="Inter" pitchFamily="34" charset="-122"/>
                 <a:cs typeface="Inter" pitchFamily="34" charset="-120"/>
               </a:rPr>
-              <a:t>More colleagues around you, all day</a:t>
+              <a:t>More people on duty, and fewer tiring patterns in the rota</a:t>
             </a:r>
             <a:endParaRPr lang="en-US" sz="1500" dirty="0"/>
           </a:p>
@@ -3951,8 +3951,8 @@
         </p:nvSpPr>
         <p:spPr>
           <a:xfrm>
-            <a:off x="4297680" y="1417320"/>
-            <a:ext cx="2194560" cy="320040"/>
+            <a:off x="4846320" y="1417320"/>
+            <a:ext cx="1920240" cy="320040"/>
           </a:xfrm>
           <a:prstGeom prst="rect">
             <a:avLst/>
@@ -3990,8 +3990,8 @@
         </p:nvSpPr>
         <p:spPr>
           <a:xfrm>
-            <a:off x="6492240" y="1417320"/>
-            <a:ext cx="2194560" cy="320040"/>
+            <a:off x="6766560" y="1417320"/>
+            <a:ext cx="1920240" cy="320040"/>
           </a:xfrm>
           <a:prstGeom prst="rect">
             <a:avLst/>
@@ -4057,7 +4057,7 @@
         <p:spPr>
           <a:xfrm>
             <a:off x="640080" y="1801368"/>
-            <a:ext cx="3657600" cy="475488"/>
+            <a:ext cx="4206240" cy="475488"/>
           </a:xfrm>
           <a:prstGeom prst="rect">
             <a:avLst/>
@@ -4095,8 +4095,8 @@
         </p:nvSpPr>
         <p:spPr>
           <a:xfrm>
-            <a:off x="4297680" y="1801368"/>
-            <a:ext cx="2194560" cy="475488"/>
+            <a:off x="4846320" y="1801368"/>
+            <a:ext cx="1920240" cy="475488"/>
           </a:xfrm>
           <a:prstGeom prst="rect">
             <a:avLst/>
@@ -4134,8 +4134,8 @@
         </p:nvSpPr>
         <p:spPr>
           <a:xfrm>
-            <a:off x="6492240" y="1801368"/>
-            <a:ext cx="2194560" cy="475488"/>
+            <a:off x="6766560" y="1801368"/>
+            <a:ext cx="1920240" cy="475488"/>
           </a:xfrm>
           <a:prstGeom prst="rect">
             <a:avLst/>
@@ -4201,7 +4201,7 @@
         <p:spPr>
           <a:xfrm>
             <a:off x="640080" y="2368296"/>
-            <a:ext cx="3657600" cy="475488"/>
+            <a:ext cx="4206240" cy="475488"/>
           </a:xfrm>
           <a:prstGeom prst="rect">
             <a:avLst/>
@@ -4239,8 +4239,8 @@
         </p:nvSpPr>
         <p:spPr>
           <a:xfrm>
-            <a:off x="4297680" y="2368296"/>
-            <a:ext cx="2194560" cy="475488"/>
+            <a:off x="4846320" y="2368296"/>
+            <a:ext cx="1920240" cy="475488"/>
           </a:xfrm>
           <a:prstGeom prst="rect">
             <a:avLst/>
@@ -4278,8 +4278,8 @@
         </p:nvSpPr>
         <p:spPr>
           <a:xfrm>
-            <a:off x="6492240" y="2368296"/>
-            <a:ext cx="2194560" cy="475488"/>
+            <a:off x="6766560" y="2368296"/>
+            <a:ext cx="1920240" cy="475488"/>
           </a:xfrm>
           <a:prstGeom prst="rect">
             <a:avLst/>
@@ -4345,7 +4345,7 @@
         <p:spPr>
           <a:xfrm>
             <a:off x="640080" y="2935224"/>
-            <a:ext cx="3657600" cy="475488"/>
+            <a:ext cx="4206240" cy="475488"/>
           </a:xfrm>
           <a:prstGeom prst="rect">
             <a:avLst/>
@@ -4383,8 +4383,8 @@
         </p:nvSpPr>
         <p:spPr>
           <a:xfrm>
-            <a:off x="4297680" y="2935224"/>
-            <a:ext cx="2194560" cy="475488"/>
+            <a:off x="4846320" y="2935224"/>
+            <a:ext cx="1920240" cy="475488"/>
           </a:xfrm>
           <a:prstGeom prst="rect">
             <a:avLst/>
@@ -4422,8 +4422,8 @@
         </p:nvSpPr>
         <p:spPr>
           <a:xfrm>
-            <a:off x="6492240" y="2935224"/>
-            <a:ext cx="2194560" cy="475488"/>
+            <a:off x="6766560" y="2935224"/>
+            <a:ext cx="1920240" cy="475488"/>
           </a:xfrm>
           <a:prstGeom prst="rect">
             <a:avLst/>
@@ -4489,7 +4489,7 @@
         <p:spPr>
           <a:xfrm>
             <a:off x="640080" y="3502152"/>
-            <a:ext cx="3657600" cy="475488"/>
+            <a:ext cx="4206240" cy="475488"/>
           </a:xfrm>
           <a:prstGeom prst="rect">
             <a:avLst/>
@@ -4513,7 +4513,7 @@
                 <a:ea typeface="Inter" pitchFamily="34" charset="-122"/>
                 <a:cs typeface="Inter" pitchFamily="34" charset="-120"/>
               </a:rPr>
-              <a:t>ORR fatigue warning signs in the design</a:t>
+              <a:t>Tiring patterns caused by the design (ORR list)</a:t>
             </a:r>
             <a:endParaRPr lang="en-US" sz="1400" dirty="0"/>
           </a:p>
@@ -4527,8 +4527,8 @@
         </p:nvSpPr>
         <p:spPr>
           <a:xfrm>
-            <a:off x="4297680" y="3502152"/>
-            <a:ext cx="2194560" cy="475488"/>
+            <a:off x="4846320" y="3502152"/>
+            <a:ext cx="1920240" cy="475488"/>
           </a:xfrm>
           <a:prstGeom prst="rect">
             <a:avLst/>
@@ -4566,8 +4566,8 @@
         </p:nvSpPr>
         <p:spPr>
           <a:xfrm>
-            <a:off x="6492240" y="3502152"/>
-            <a:ext cx="2194560" cy="475488"/>
+            <a:off x="6766560" y="3502152"/>
+            <a:ext cx="1920240" cy="475488"/>
           </a:xfrm>
           <a:prstGeom prst="rect">
             <a:avLst/>
@@ -4657,7 +4657,7 @@
                 <a:ea typeface="Inter" pitchFamily="34" charset="-122"/>
                 <a:cs typeface="Inter" pitchFamily="34" charset="-120"/>
               </a:rPr>
-              <a:t>Never fewer than three on the floor — and no fatigue warnings.</a:t>
+              <a:t>Never fewer than three on the floor, and none of the avoidable tiring patterns.</a:t>
             </a:r>
             <a:endParaRPr lang="en-US" sz="1400" dirty="0"/>
           </a:p>
@@ -4666,6 +4666,45 @@
       <p:sp>
         <p:nvSpPr>
           <p:cNvPr id="24" name="Text 22"/>
+          <p:cNvSpPr txBox="1"/>
+          <p:nvPr/>
+        </p:nvSpPr>
+        <p:spPr>
+          <a:xfrm>
+            <a:off x="4023360" y="4754880"/>
+            <a:ext cx="4663440" cy="310896"/>
+          </a:xfrm>
+          <a:prstGeom prst="rect">
+            <a:avLst/>
+          </a:prstGeom>
+          <a:noFill/>
+          <a:ln/>
+        </p:spPr>
+        <p:txBody>
+          <a:bodyPr wrap="square" lIns="0" tIns="0" rIns="0" bIns="0" rtlCol="0" anchor="t"/>
+          <a:lstStyle/>
+          <a:p>
+            <a:pPr algn="r" indent="0" marL="0">
+              <a:buNone/>
+            </a:pPr>
+            <a:r>
+              <a:rPr lang="en-US" sz="850" i="1" dirty="0">
+                <a:solidFill>
+                  <a:srgbClr val="5B6778"/>
+                </a:solidFill>
+                <a:latin typeface="Inter" pitchFamily="34" charset="0"/>
+                <a:ea typeface="Inter" pitchFamily="34" charset="-122"/>
+                <a:cs typeface="Inter" pitchFamily="34" charset="-120"/>
+              </a:rPr>
+              <a:t>Not counted: early starts and weekly rotation, which every link has. Not a risk assessment.</a:t>
+            </a:r>
+            <a:endParaRPr lang="en-US" sz="850" dirty="0"/>
+          </a:p>
+        </p:txBody>
+      </p:sp>
+      <p:sp>
+        <p:nvSpPr>
+          <p:cNvPr id="25" name="Text 23"/>
           <p:cNvSpPr txBox="1"/>
           <p:nvPr/>
         </p:nvSpPr>
@@ -6037,7 +6076,7 @@
                           <a:ea typeface="Inter" pitchFamily="34" charset="-122"/>
                           <a:cs typeface="Inter" pitchFamily="34" charset="-120"/>
                         </a:rPr>
-                        <a:t>Days at work a year</a:t>
+                        <a:t>Days at work a year, not counting Sundays</a:t>
                       </a:r>
                       <a:endParaRPr lang="en-US" sz="1200" dirty="0">
                         <a:latin typeface="Inter" charset="0"/>
@@ -7685,7 +7724,7 @@
                           <a:ea typeface="Inter" pitchFamily="34" charset="-122"/>
                           <a:cs typeface="Inter" pitchFamily="34" charset="-120"/>
                         </a:rPr>
-                        <a:t>ORR fatigue warning signs</a:t>
+                        <a:t>Tiring patterns caused by the design (ORR)</a:t>
                       </a:r>
                       <a:endParaRPr lang="en-US" sz="1200" dirty="0">
                         <a:latin typeface="Inter" charset="0"/>
@@ -9949,8 +9988,8 @@
         </p:nvSpPr>
         <p:spPr>
           <a:xfrm>
-            <a:off x="4297680" y="1417320"/>
-            <a:ext cx="2194560" cy="320040"/>
+            <a:off x="4846320" y="1417320"/>
+            <a:ext cx="1920240" cy="320040"/>
           </a:xfrm>
           <a:prstGeom prst="rect">
             <a:avLst/>
@@ -9988,8 +10027,8 @@
         </p:nvSpPr>
         <p:spPr>
           <a:xfrm>
-            <a:off x="6492240" y="1417320"/>
-            <a:ext cx="2194560" cy="320040"/>
+            <a:off x="6766560" y="1417320"/>
+            <a:ext cx="1920240" cy="320040"/>
           </a:xfrm>
           <a:prstGeom prst="rect">
             <a:avLst/>
@@ -10055,7 +10094,7 @@
         <p:spPr>
           <a:xfrm>
             <a:off x="640080" y="1801368"/>
-            <a:ext cx="3657600" cy="475488"/>
+            <a:ext cx="4206240" cy="475488"/>
           </a:xfrm>
           <a:prstGeom prst="rect">
             <a:avLst/>
@@ -10093,8 +10132,8 @@
         </p:nvSpPr>
         <p:spPr>
           <a:xfrm>
-            <a:off x="4297680" y="1801368"/>
-            <a:ext cx="2194560" cy="475488"/>
+            <a:off x="4846320" y="1801368"/>
+            <a:ext cx="1920240" cy="475488"/>
           </a:xfrm>
           <a:prstGeom prst="rect">
             <a:avLst/>
@@ -10132,8 +10171,8 @@
         </p:nvSpPr>
         <p:spPr>
           <a:xfrm>
-            <a:off x="6492240" y="1801368"/>
-            <a:ext cx="2194560" cy="475488"/>
+            <a:off x="6766560" y="1801368"/>
+            <a:ext cx="1920240" cy="475488"/>
           </a:xfrm>
           <a:prstGeom prst="rect">
             <a:avLst/>
@@ -10199,7 +10238,7 @@
         <p:spPr>
           <a:xfrm>
             <a:off x="640080" y="2368296"/>
-            <a:ext cx="3657600" cy="475488"/>
+            <a:ext cx="4206240" cy="475488"/>
           </a:xfrm>
           <a:prstGeom prst="rect">
             <a:avLst/>
@@ -10223,7 +10262,7 @@
                 <a:ea typeface="Inter" pitchFamily="34" charset="-122"/>
                 <a:cs typeface="Inter" pitchFamily="34" charset="-120"/>
               </a:rPr>
-              <a:t>Days worked a week (on average)</a:t>
+              <a:t>Days at work a week, not counting Sundays</a:t>
             </a:r>
             <a:endParaRPr lang="en-US" sz="1400" dirty="0"/>
           </a:p>
@@ -10237,8 +10276,8 @@
         </p:nvSpPr>
         <p:spPr>
           <a:xfrm>
-            <a:off x="4297680" y="2368296"/>
-            <a:ext cx="2194560" cy="475488"/>
+            <a:off x="4846320" y="2368296"/>
+            <a:ext cx="1920240" cy="475488"/>
           </a:xfrm>
           <a:prstGeom prst="rect">
             <a:avLst/>
@@ -10276,8 +10315,8 @@
         </p:nvSpPr>
         <p:spPr>
           <a:xfrm>
-            <a:off x="6492240" y="2368296"/>
-            <a:ext cx="2194560" cy="475488"/>
+            <a:off x="6766560" y="2368296"/>
+            <a:ext cx="1920240" cy="475488"/>
           </a:xfrm>
           <a:prstGeom prst="rect">
             <a:avLst/>
@@ -10343,7 +10382,7 @@
         <p:spPr>
           <a:xfrm>
             <a:off x="640080" y="2935224"/>
-            <a:ext cx="3657600" cy="475488"/>
+            <a:ext cx="4206240" cy="475488"/>
           </a:xfrm>
           <a:prstGeom prst="rect">
             <a:avLst/>
@@ -10367,7 +10406,7 @@
                 <a:ea typeface="Inter" pitchFamily="34" charset="-122"/>
                 <a:cs typeface="Inter" pitchFamily="34" charset="-120"/>
               </a:rPr>
-              <a:t>Days worked a year</a:t>
+              <a:t>Days at work a year, not counting Sundays</a:t>
             </a:r>
             <a:endParaRPr lang="en-US" sz="1400" dirty="0"/>
           </a:p>
@@ -10381,8 +10420,8 @@
         </p:nvSpPr>
         <p:spPr>
           <a:xfrm>
-            <a:off x="4297680" y="2935224"/>
-            <a:ext cx="2194560" cy="475488"/>
+            <a:off x="4846320" y="2935224"/>
+            <a:ext cx="1920240" cy="475488"/>
           </a:xfrm>
           <a:prstGeom prst="rect">
             <a:avLst/>
@@ -10420,8 +10459,8 @@
         </p:nvSpPr>
         <p:spPr>
           <a:xfrm>
-            <a:off x="6492240" y="2935224"/>
-            <a:ext cx="2194560" cy="475488"/>
+            <a:off x="6766560" y="2935224"/>
+            <a:ext cx="1920240" cy="475488"/>
           </a:xfrm>
           <a:prstGeom prst="rect">
             <a:avLst/>
@@ -10487,7 +10526,7 @@
         <p:spPr>
           <a:xfrm>
             <a:off x="640080" y="3502152"/>
-            <a:ext cx="3657600" cy="475488"/>
+            <a:ext cx="4206240" cy="475488"/>
           </a:xfrm>
           <a:prstGeom prst="rect">
             <a:avLst/>
@@ -10511,7 +10550,7 @@
                 <a:ea typeface="Inter" pitchFamily="34" charset="-122"/>
                 <a:cs typeface="Inter" pitchFamily="34" charset="-120"/>
               </a:rPr>
-              <a:t>… after 32 days’ annual leave</a:t>
+              <a:t>… after 32 days’ leave (standard CEA contract)</a:t>
             </a:r>
             <a:endParaRPr lang="en-US" sz="1400" dirty="0"/>
           </a:p>
@@ -10525,8 +10564,8 @@
         </p:nvSpPr>
         <p:spPr>
           <a:xfrm>
-            <a:off x="4297680" y="3502152"/>
-            <a:ext cx="2194560" cy="475488"/>
+            <a:off x="4846320" y="3502152"/>
+            <a:ext cx="1920240" cy="475488"/>
           </a:xfrm>
           <a:prstGeom prst="rect">
             <a:avLst/>
@@ -10564,8 +10603,8 @@
         </p:nvSpPr>
         <p:spPr>
           <a:xfrm>
-            <a:off x="6492240" y="3502152"/>
-            <a:ext cx="2194560" cy="475488"/>
+            <a:off x="6766560" y="3502152"/>
+            <a:ext cx="1920240" cy="475488"/>
           </a:xfrm>
           <a:prstGeom prst="rect">
             <a:avLst/>
@@ -10664,6 +10703,45 @@
       <p:sp>
         <p:nvSpPr>
           <p:cNvPr id="24" name="Text 22"/>
+          <p:cNvSpPr txBox="1"/>
+          <p:nvPr/>
+        </p:nvSpPr>
+        <p:spPr>
+          <a:xfrm>
+            <a:off x="4023360" y="4754880"/>
+            <a:ext cx="4663440" cy="310896"/>
+          </a:xfrm>
+          <a:prstGeom prst="rect">
+            <a:avLst/>
+          </a:prstGeom>
+          <a:noFill/>
+          <a:ln/>
+        </p:spPr>
+        <p:txBody>
+          <a:bodyPr wrap="square" lIns="0" tIns="0" rIns="0" bIns="0" rtlCol="0" anchor="t"/>
+          <a:lstStyle/>
+          <a:p>
+            <a:pPr algn="r" indent="0" marL="0">
+              <a:buNone/>
+            </a:pPr>
+            <a:r>
+              <a:rPr lang="en-US" sz="850" i="1" dirty="0">
+                <a:solidFill>
+                  <a:srgbClr val="5B6778"/>
+                </a:solidFill>
+                <a:latin typeface="Inter" pitchFamily="34" charset="0"/>
+                <a:ea typeface="Inter" pitchFamily="34" charset="-122"/>
+                <a:cs typeface="Inter" pitchFamily="34" charset="-120"/>
+              </a:rPr>
+              <a:t>Sunday overtime not counted; with it, about 1 fewer day a year.</a:t>
+            </a:r>
+            <a:endParaRPr lang="en-US" sz="850" dirty="0"/>
+          </a:p>
+        </p:txBody>
+      </p:sp>
+      <p:sp>
+        <p:nvSpPr>
+          <p:cNvPr id="25" name="Text 23"/>
           <p:cNvSpPr txBox="1"/>
           <p:nvPr/>
         </p:nvSpPr>
@@ -10804,7 +10882,7 @@
                 <a:ea typeface="Inter" pitchFamily="34" charset="-122"/>
                 <a:cs typeface="Inter" pitchFamily="34" charset="-120"/>
               </a:rPr>
-              <a:t>Your pay follows your contracted hours — and they do not change</a:t>
+              <a:t>Your basic pay follows your contracted hours — and they do not change</a:t>
             </a:r>
             <a:endParaRPr lang="en-US" sz="1500" dirty="0"/>
           </a:p>
@@ -11380,7 +11458,7 @@
                 <a:ea typeface="Inter" pitchFamily="34" charset="-122"/>
                 <a:cs typeface="Inter" pitchFamily="34" charset="-120"/>
               </a:rPr>
-              <a:t>No. The same basic pay, and about four more Saturdays a year at time and a quarter.</a:t>
+              <a:t>No — basic pay stays the same, plus about four more Saturdays at time and a quarter.</a:t>
             </a:r>
             <a:endParaRPr lang="en-US" sz="1400" dirty="0"/>
           </a:p>
@@ -11389,6 +11467,45 @@
       <p:sp>
         <p:nvSpPr>
           <p:cNvPr id="20" name="Text 18"/>
+          <p:cNvSpPr txBox="1"/>
+          <p:nvPr/>
+        </p:nvSpPr>
+        <p:spPr>
+          <a:xfrm>
+            <a:off x="4023360" y="4754880"/>
+            <a:ext cx="4663440" cy="310896"/>
+          </a:xfrm>
+          <a:prstGeom prst="rect">
+            <a:avLst/>
+          </a:prstGeom>
+          <a:noFill/>
+          <a:ln/>
+        </p:spPr>
+        <p:txBody>
+          <a:bodyPr wrap="square" lIns="0" tIns="0" rIns="0" bIns="0" rtlCol="0" anchor="t"/>
+          <a:lstStyle/>
+          <a:p>
+            <a:pPr algn="r" indent="0" marL="0">
+              <a:buNone/>
+            </a:pPr>
+            <a:r>
+              <a:rPr lang="en-US" sz="850" i="1" dirty="0">
+                <a:solidFill>
+                  <a:srgbClr val="5B6778"/>
+                </a:solidFill>
+                <a:latin typeface="Inter" pitchFamily="34" charset="0"/>
+                <a:ea typeface="Inter" pitchFamily="34" charset="-122"/>
+                <a:cs typeface="Inter" pitchFamily="34" charset="-120"/>
+              </a:rPr>
+              <a:t>Link averages, not a payslip: overtime and absence change what you earn.</a:t>
+            </a:r>
+            <a:endParaRPr lang="en-US" sz="850" dirty="0"/>
+          </a:p>
+        </p:txBody>
+      </p:sp>
+      <p:sp>
+        <p:nvSpPr>
+          <p:cNvPr id="21" name="Text 19"/>
           <p:cNvSpPr txBox="1"/>
           <p:nvPr/>
         </p:nvSpPr>
@@ -12542,7 +12659,7 @@
                 <a:ea typeface="Inter" pitchFamily="34" charset="-122"/>
                 <a:cs typeface="Inter" pitchFamily="34" charset="-120"/>
               </a:rPr>
-              <a:t>Yes, a little — December needs more people at the close</a:t>
+              <a:t>Yes — about one extra late finish every two or three weeks</a:t>
             </a:r>
             <a:endParaRPr lang="en-US" sz="1500" dirty="0"/>
           </a:p>
@@ -13262,7 +13379,7 @@
                 <a:ea typeface="Inter" pitchFamily="34" charset="-122"/>
                 <a:cs typeface="Inter" pitchFamily="34" charset="-120"/>
               </a:rPr>
-              <a:t>About one extra late finish every two or three weeks — but every closer is shorter.</a:t>
+              <a:t>December needs more people at the close — but every closing shift is shorter.</a:t>
             </a:r>
             <a:endParaRPr lang="en-US" sz="1400" dirty="0"/>
           </a:p>
@@ -13271,6 +13388,45 @@
       <p:sp>
         <p:nvSpPr>
           <p:cNvPr id="24" name="Text 22"/>
+          <p:cNvSpPr txBox="1"/>
+          <p:nvPr/>
+        </p:nvSpPr>
+        <p:spPr>
+          <a:xfrm>
+            <a:off x="4023360" y="4754880"/>
+            <a:ext cx="4663440" cy="310896"/>
+          </a:xfrm>
+          <a:prstGeom prst="rect">
+            <a:avLst/>
+          </a:prstGeom>
+          <a:noFill/>
+          <a:ln/>
+        </p:spPr>
+        <p:txBody>
+          <a:bodyPr wrap="square" lIns="0" tIns="0" rIns="0" bIns="0" rtlCol="0" anchor="t"/>
+          <a:lstStyle/>
+          <a:p>
+            <a:pPr algn="r" indent="0" marL="0">
+              <a:buNone/>
+            </a:pPr>
+            <a:r>
+              <a:rPr lang="en-US" sz="850" i="1" dirty="0">
+                <a:solidFill>
+                  <a:srgbClr val="5B6778"/>
+                </a:solidFill>
+                <a:latin typeface="Inter" pitchFamily="34" charset="0"/>
+                <a:ea typeface="Inter" pitchFamily="34" charset="-122"/>
+                <a:cs typeface="Inter" pitchFamily="34" charset="-120"/>
+              </a:rPr>
+              <a:t>Each person, averaged across the whole link.</a:t>
+            </a:r>
+            <a:endParaRPr lang="en-US" sz="850" dirty="0"/>
+          </a:p>
+        </p:txBody>
+      </p:sp>
+      <p:sp>
+        <p:nvSpPr>
+          <p:cNvPr id="25" name="Text 23"/>
           <p:cNvSpPr txBox="1"/>
           <p:nvPr/>
         </p:nvSpPr>

--- a/docs/proposals/presentations/Familiar-Nine-for-colleagues.pptx
+++ b/docs/proposals/presentations/Familiar-Nine-for-colleagues.pptx
@@ -604,7 +604,7 @@
           <a:p>
             <a:r>
               <a:rPr lang="en-US" dirty="0"/>
-              <a:t>Earlies here means a start before 11:00. Sundays: today 8 Sunday duties across 16 working weeks, Familiar Nine 10 across 20 — the same one-in-two share.</a:t>
+              <a:t>Earlies here means a start before 11:00. Sundays: today 8 Sunday duties across 16 working weeks, Familiar Nine 10 across 20 — the same one-in-two share of working weeks. Because cover weeks come round a little less often, that is about one more Sunday a year each (22 against 21).</a:t>
             </a:r>
             <a:endParaRPr lang="en-US" dirty="0"/>
           </a:p>
@@ -1308,7 +1308,7 @@
           <a:p>
             <a:r>
               <a:rPr lang="en-US" dirty="0"/>
-              <a:t>Monday to Saturday, counting a cover week as four days worked, the same way the clerks do. Sundays are overtime by agreement, so they are not in these figures — today or in Familiar Nine. Fewer days is possible because the average shift is a few minutes longer, which is the next slide.</a:t>
+              <a:t>Monday to Saturday, counting a cover week as four days worked, the same way the clerks do. Sundays are overtime by agreement, so they are not in these figures — today or in Familiar Nine. If asked: counting Sunday overtime too, it is about one fewer day a year rather than two. 32 days is the standard CEA contract. Fewer days is possible because the average shift is a few minutes longer, which is the next slide.</a:t>
             </a:r>
             <a:endParaRPr lang="en-US" dirty="0"/>
           </a:p>
@@ -2699,7 +2699,7 @@
                 <a:ea typeface="Inter" pitchFamily="34" charset="-122"/>
                 <a:cs typeface="Inter" pitchFamily="34" charset="-120"/>
               </a:rPr>
-              <a:t>Not part of the contract, same as now — one Sunday every other working week, as today (about one more a year each).</a:t>
+              <a:t>Not part of the contract, same as now — and about the same number of Sundays as today.</a:t>
             </a:r>
             <a:endParaRPr lang="en-US" sz="1300" dirty="0"/>
           </a:p>
@@ -3898,7 +3898,7 @@
                 <a:ea typeface="Inter" pitchFamily="34" charset="-122"/>
                 <a:cs typeface="Inter" pitchFamily="34" charset="-120"/>
               </a:rPr>
-              <a:t>More colleagues around you</a:t>
+              <a:t>More staff on the floor</a:t>
             </a:r>
             <a:endParaRPr lang="en-US" sz="3000" dirty="0"/>
           </a:p>
@@ -3937,7 +3937,7 @@
                 <a:ea typeface="Inter" pitchFamily="34" charset="-122"/>
                 <a:cs typeface="Inter" pitchFamily="34" charset="-120"/>
               </a:rPr>
-              <a:t>More people on duty, and fewer tiring patterns in the rota</a:t>
+              <a:t>More people on duty with you, all day</a:t>
             </a:r>
             <a:endParaRPr lang="en-US" sz="1500" dirty="0"/>
           </a:p>
@@ -3951,8 +3951,8 @@
         </p:nvSpPr>
         <p:spPr>
           <a:xfrm>
-            <a:off x="4846320" y="1417320"/>
-            <a:ext cx="1920240" cy="320040"/>
+            <a:off x="4297680" y="1417320"/>
+            <a:ext cx="2194560" cy="320040"/>
           </a:xfrm>
           <a:prstGeom prst="rect">
             <a:avLst/>
@@ -3990,8 +3990,8 @@
         </p:nvSpPr>
         <p:spPr>
           <a:xfrm>
-            <a:off x="6766560" y="1417320"/>
-            <a:ext cx="1920240" cy="320040"/>
+            <a:off x="6492240" y="1417320"/>
+            <a:ext cx="2194560" cy="320040"/>
           </a:xfrm>
           <a:prstGeom prst="rect">
             <a:avLst/>
@@ -4057,7 +4057,7 @@
         <p:spPr>
           <a:xfrm>
             <a:off x="640080" y="1801368"/>
-            <a:ext cx="4206240" cy="475488"/>
+            <a:ext cx="3657600" cy="475488"/>
           </a:xfrm>
           <a:prstGeom prst="rect">
             <a:avLst/>
@@ -4095,8 +4095,8 @@
         </p:nvSpPr>
         <p:spPr>
           <a:xfrm>
-            <a:off x="4846320" y="1801368"/>
-            <a:ext cx="1920240" cy="475488"/>
+            <a:off x="4297680" y="1801368"/>
+            <a:ext cx="2194560" cy="475488"/>
           </a:xfrm>
           <a:prstGeom prst="rect">
             <a:avLst/>
@@ -4134,8 +4134,8 @@
         </p:nvSpPr>
         <p:spPr>
           <a:xfrm>
-            <a:off x="6766560" y="1801368"/>
-            <a:ext cx="1920240" cy="475488"/>
+            <a:off x="6492240" y="1801368"/>
+            <a:ext cx="2194560" cy="475488"/>
           </a:xfrm>
           <a:prstGeom prst="rect">
             <a:avLst/>
@@ -4201,7 +4201,7 @@
         <p:spPr>
           <a:xfrm>
             <a:off x="640080" y="2368296"/>
-            <a:ext cx="4206240" cy="475488"/>
+            <a:ext cx="3657600" cy="475488"/>
           </a:xfrm>
           <a:prstGeom prst="rect">
             <a:avLst/>
@@ -4239,8 +4239,8 @@
         </p:nvSpPr>
         <p:spPr>
           <a:xfrm>
-            <a:off x="4846320" y="2368296"/>
-            <a:ext cx="1920240" cy="475488"/>
+            <a:off x="4297680" y="2368296"/>
+            <a:ext cx="2194560" cy="475488"/>
           </a:xfrm>
           <a:prstGeom prst="rect">
             <a:avLst/>
@@ -4278,8 +4278,8 @@
         </p:nvSpPr>
         <p:spPr>
           <a:xfrm>
-            <a:off x="6766560" y="2368296"/>
-            <a:ext cx="1920240" cy="475488"/>
+            <a:off x="6492240" y="2368296"/>
+            <a:ext cx="2194560" cy="475488"/>
           </a:xfrm>
           <a:prstGeom prst="rect">
             <a:avLst/>
@@ -4345,7 +4345,7 @@
         <p:spPr>
           <a:xfrm>
             <a:off x="640080" y="2935224"/>
-            <a:ext cx="4206240" cy="475488"/>
+            <a:ext cx="3657600" cy="475488"/>
           </a:xfrm>
           <a:prstGeom prst="rect">
             <a:avLst/>
@@ -4383,8 +4383,8 @@
         </p:nvSpPr>
         <p:spPr>
           <a:xfrm>
-            <a:off x="4846320" y="2935224"/>
-            <a:ext cx="1920240" cy="475488"/>
+            <a:off x="4297680" y="2935224"/>
+            <a:ext cx="2194560" cy="475488"/>
           </a:xfrm>
           <a:prstGeom prst="rect">
             <a:avLst/>
@@ -4422,8 +4422,8 @@
         </p:nvSpPr>
         <p:spPr>
           <a:xfrm>
-            <a:off x="6766560" y="2935224"/>
-            <a:ext cx="1920240" cy="475488"/>
+            <a:off x="6492240" y="2935224"/>
+            <a:ext cx="2194560" cy="475488"/>
           </a:xfrm>
           <a:prstGeom prst="rect">
             <a:avLst/>
@@ -4489,7 +4489,7 @@
         <p:spPr>
           <a:xfrm>
             <a:off x="640080" y="3502152"/>
-            <a:ext cx="4206240" cy="475488"/>
+            <a:ext cx="3657600" cy="475488"/>
           </a:xfrm>
           <a:prstGeom prst="rect">
             <a:avLst/>
@@ -4513,7 +4513,7 @@
                 <a:ea typeface="Inter" pitchFamily="34" charset="-122"/>
                 <a:cs typeface="Inter" pitchFamily="34" charset="-120"/>
               </a:rPr>
-              <a:t>Tiring patterns caused by the design (ORR list)</a:t>
+              <a:t>Avoidable tiring patterns in the rota</a:t>
             </a:r>
             <a:endParaRPr lang="en-US" sz="1400" dirty="0"/>
           </a:p>
@@ -4527,8 +4527,8 @@
         </p:nvSpPr>
         <p:spPr>
           <a:xfrm>
-            <a:off x="4846320" y="3502152"/>
-            <a:ext cx="1920240" cy="475488"/>
+            <a:off x="4297680" y="3502152"/>
+            <a:ext cx="2194560" cy="475488"/>
           </a:xfrm>
           <a:prstGeom prst="rect">
             <a:avLst/>
@@ -4566,8 +4566,8 @@
         </p:nvSpPr>
         <p:spPr>
           <a:xfrm>
-            <a:off x="6766560" y="3502152"/>
-            <a:ext cx="1920240" cy="475488"/>
+            <a:off x="6492240" y="3502152"/>
+            <a:ext cx="2194560" cy="475488"/>
           </a:xfrm>
           <a:prstGeom prst="rect">
             <a:avLst/>
@@ -4666,45 +4666,6 @@
       <p:sp>
         <p:nvSpPr>
           <p:cNvPr id="24" name="Text 22"/>
-          <p:cNvSpPr txBox="1"/>
-          <p:nvPr/>
-        </p:nvSpPr>
-        <p:spPr>
-          <a:xfrm>
-            <a:off x="4023360" y="4754880"/>
-            <a:ext cx="4663440" cy="310896"/>
-          </a:xfrm>
-          <a:prstGeom prst="rect">
-            <a:avLst/>
-          </a:prstGeom>
-          <a:noFill/>
-          <a:ln/>
-        </p:spPr>
-        <p:txBody>
-          <a:bodyPr wrap="square" lIns="0" tIns="0" rIns="0" bIns="0" rtlCol="0" anchor="t"/>
-          <a:lstStyle/>
-          <a:p>
-            <a:pPr algn="r" indent="0" marL="0">
-              <a:buNone/>
-            </a:pPr>
-            <a:r>
-              <a:rPr lang="en-US" sz="850" i="1" dirty="0">
-                <a:solidFill>
-                  <a:srgbClr val="5B6778"/>
-                </a:solidFill>
-                <a:latin typeface="Inter" pitchFamily="34" charset="0"/>
-                <a:ea typeface="Inter" pitchFamily="34" charset="-122"/>
-                <a:cs typeface="Inter" pitchFamily="34" charset="-120"/>
-              </a:rPr>
-              <a:t>Not counted: early starts and weekly rotation, which every link has. Not a risk assessment.</a:t>
-            </a:r>
-            <a:endParaRPr lang="en-US" sz="850" dirty="0"/>
-          </a:p>
-        </p:txBody>
-      </p:sp>
-      <p:sp>
-        <p:nvSpPr>
-          <p:cNvPr id="25" name="Text 23"/>
           <p:cNvSpPr txBox="1"/>
           <p:nvPr/>
         </p:nvSpPr>
@@ -6076,7 +6037,7 @@
                           <a:ea typeface="Inter" pitchFamily="34" charset="-122"/>
                           <a:cs typeface="Inter" pitchFamily="34" charset="-120"/>
                         </a:rPr>
-                        <a:t>Days at work a year, not counting Sundays</a:t>
+                        <a:t>Contracted days at work a year</a:t>
                       </a:r>
                       <a:endParaRPr lang="en-US" sz="1200" dirty="0">
                         <a:latin typeface="Inter" charset="0"/>
@@ -6762,7 +6723,7 @@
                           <a:ea typeface="Inter" pitchFamily="34" charset="-122"/>
                           <a:cs typeface="Inter" pitchFamily="34" charset="-120"/>
                         </a:rPr>
-                        <a:t>4 in 20</a:t>
+                        <a:t>4 in 20 (one in five)</a:t>
                       </a:r>
                       <a:endParaRPr lang="en-US" sz="1200" dirty="0">
                         <a:latin typeface="Inter" charset="0"/>
@@ -6830,7 +6791,7 @@
                           <a:ea typeface="Inter" pitchFamily="34" charset="-122"/>
                           <a:cs typeface="Inter" pitchFamily="34" charset="-120"/>
                         </a:rPr>
-                        <a:t>6 in 24</a:t>
+                        <a:t>6 in 24 (one in four)</a:t>
                       </a:r>
                       <a:endParaRPr lang="en-US" sz="1200" dirty="0">
                         <a:latin typeface="Inter" charset="0"/>
@@ -7724,7 +7685,7 @@
                           <a:ea typeface="Inter" pitchFamily="34" charset="-122"/>
                           <a:cs typeface="Inter" pitchFamily="34" charset="-120"/>
                         </a:rPr>
-                        <a:t>Tiring patterns caused by the design (ORR)</a:t>
+                        <a:t>Avoidable tiring patterns in the rota</a:t>
                       </a:r>
                       <a:endParaRPr lang="en-US" sz="1200" dirty="0">
                         <a:latin typeface="Inter" charset="0"/>
@@ -8810,7 +8771,7 @@
                 <a:ea typeface="Inter" pitchFamily="34" charset="-122"/>
                 <a:cs typeface="Inter" pitchFamily="34" charset="-120"/>
               </a:rPr>
-              <a:t>today 4 in 20</a:t>
+              <a:t>one in four, not one in five</a:t>
             </a:r>
             <a:endParaRPr lang="en-US" sz="1200" dirty="0"/>
           </a:p>
@@ -9988,8 +9949,8 @@
         </p:nvSpPr>
         <p:spPr>
           <a:xfrm>
-            <a:off x="4846320" y="1417320"/>
-            <a:ext cx="1920240" cy="320040"/>
+            <a:off x="4297680" y="1417320"/>
+            <a:ext cx="2194560" cy="320040"/>
           </a:xfrm>
           <a:prstGeom prst="rect">
             <a:avLst/>
@@ -10027,8 +9988,8 @@
         </p:nvSpPr>
         <p:spPr>
           <a:xfrm>
-            <a:off x="6766560" y="1417320"/>
-            <a:ext cx="1920240" cy="320040"/>
+            <a:off x="6492240" y="1417320"/>
+            <a:ext cx="2194560" cy="320040"/>
           </a:xfrm>
           <a:prstGeom prst="rect">
             <a:avLst/>
@@ -10094,7 +10055,7 @@
         <p:spPr>
           <a:xfrm>
             <a:off x="640080" y="1801368"/>
-            <a:ext cx="4206240" cy="475488"/>
+            <a:ext cx="3657600" cy="475488"/>
           </a:xfrm>
           <a:prstGeom prst="rect">
             <a:avLst/>
@@ -10132,8 +10093,8 @@
         </p:nvSpPr>
         <p:spPr>
           <a:xfrm>
-            <a:off x="4846320" y="1801368"/>
-            <a:ext cx="1920240" cy="475488"/>
+            <a:off x="4297680" y="1801368"/>
+            <a:ext cx="2194560" cy="475488"/>
           </a:xfrm>
           <a:prstGeom prst="rect">
             <a:avLst/>
@@ -10171,8 +10132,8 @@
         </p:nvSpPr>
         <p:spPr>
           <a:xfrm>
-            <a:off x="6766560" y="1801368"/>
-            <a:ext cx="1920240" cy="475488"/>
+            <a:off x="6492240" y="1801368"/>
+            <a:ext cx="2194560" cy="475488"/>
           </a:xfrm>
           <a:prstGeom prst="rect">
             <a:avLst/>
@@ -10238,7 +10199,7 @@
         <p:spPr>
           <a:xfrm>
             <a:off x="640080" y="2368296"/>
-            <a:ext cx="4206240" cy="475488"/>
+            <a:ext cx="3657600" cy="475488"/>
           </a:xfrm>
           <a:prstGeom prst="rect">
             <a:avLst/>
@@ -10262,7 +10223,7 @@
                 <a:ea typeface="Inter" pitchFamily="34" charset="-122"/>
                 <a:cs typeface="Inter" pitchFamily="34" charset="-120"/>
               </a:rPr>
-              <a:t>Days at work a week, not counting Sundays</a:t>
+              <a:t>Contracted days at work a week</a:t>
             </a:r>
             <a:endParaRPr lang="en-US" sz="1400" dirty="0"/>
           </a:p>
@@ -10276,8 +10237,8 @@
         </p:nvSpPr>
         <p:spPr>
           <a:xfrm>
-            <a:off x="4846320" y="2368296"/>
-            <a:ext cx="1920240" cy="475488"/>
+            <a:off x="4297680" y="2368296"/>
+            <a:ext cx="2194560" cy="475488"/>
           </a:xfrm>
           <a:prstGeom prst="rect">
             <a:avLst/>
@@ -10315,8 +10276,8 @@
         </p:nvSpPr>
         <p:spPr>
           <a:xfrm>
-            <a:off x="6766560" y="2368296"/>
-            <a:ext cx="1920240" cy="475488"/>
+            <a:off x="6492240" y="2368296"/>
+            <a:ext cx="2194560" cy="475488"/>
           </a:xfrm>
           <a:prstGeom prst="rect">
             <a:avLst/>
@@ -10382,7 +10343,7 @@
         <p:spPr>
           <a:xfrm>
             <a:off x="640080" y="2935224"/>
-            <a:ext cx="4206240" cy="475488"/>
+            <a:ext cx="3657600" cy="475488"/>
           </a:xfrm>
           <a:prstGeom prst="rect">
             <a:avLst/>
@@ -10406,7 +10367,7 @@
                 <a:ea typeface="Inter" pitchFamily="34" charset="-122"/>
                 <a:cs typeface="Inter" pitchFamily="34" charset="-120"/>
               </a:rPr>
-              <a:t>Days at work a year, not counting Sundays</a:t>
+              <a:t>Contracted days at work a year</a:t>
             </a:r>
             <a:endParaRPr lang="en-US" sz="1400" dirty="0"/>
           </a:p>
@@ -10420,8 +10381,8 @@
         </p:nvSpPr>
         <p:spPr>
           <a:xfrm>
-            <a:off x="4846320" y="2935224"/>
-            <a:ext cx="1920240" cy="475488"/>
+            <a:off x="4297680" y="2935224"/>
+            <a:ext cx="2194560" cy="475488"/>
           </a:xfrm>
           <a:prstGeom prst="rect">
             <a:avLst/>
@@ -10459,8 +10420,8 @@
         </p:nvSpPr>
         <p:spPr>
           <a:xfrm>
-            <a:off x="6766560" y="2935224"/>
-            <a:ext cx="1920240" cy="475488"/>
+            <a:off x="6492240" y="2935224"/>
+            <a:ext cx="2194560" cy="475488"/>
           </a:xfrm>
           <a:prstGeom prst="rect">
             <a:avLst/>
@@ -10526,7 +10487,7 @@
         <p:spPr>
           <a:xfrm>
             <a:off x="640080" y="3502152"/>
-            <a:ext cx="4206240" cy="475488"/>
+            <a:ext cx="3657600" cy="475488"/>
           </a:xfrm>
           <a:prstGeom prst="rect">
             <a:avLst/>
@@ -10550,7 +10511,7 @@
                 <a:ea typeface="Inter" pitchFamily="34" charset="-122"/>
                 <a:cs typeface="Inter" pitchFamily="34" charset="-120"/>
               </a:rPr>
-              <a:t>… after 32 days’ leave (standard CEA contract)</a:t>
+              <a:t>… after 32 days’ annual leave</a:t>
             </a:r>
             <a:endParaRPr lang="en-US" sz="1400" dirty="0"/>
           </a:p>
@@ -10564,8 +10525,8 @@
         </p:nvSpPr>
         <p:spPr>
           <a:xfrm>
-            <a:off x="4846320" y="3502152"/>
-            <a:ext cx="1920240" cy="475488"/>
+            <a:off x="4297680" y="3502152"/>
+            <a:ext cx="2194560" cy="475488"/>
           </a:xfrm>
           <a:prstGeom prst="rect">
             <a:avLst/>
@@ -10603,8 +10564,8 @@
         </p:nvSpPr>
         <p:spPr>
           <a:xfrm>
-            <a:off x="6766560" y="3502152"/>
-            <a:ext cx="1920240" cy="475488"/>
+            <a:off x="6492240" y="3502152"/>
+            <a:ext cx="2194560" cy="475488"/>
           </a:xfrm>
           <a:prstGeom prst="rect">
             <a:avLst/>
@@ -10703,45 +10664,6 @@
       <p:sp>
         <p:nvSpPr>
           <p:cNvPr id="24" name="Text 22"/>
-          <p:cNvSpPr txBox="1"/>
-          <p:nvPr/>
-        </p:nvSpPr>
-        <p:spPr>
-          <a:xfrm>
-            <a:off x="4023360" y="4754880"/>
-            <a:ext cx="4663440" cy="310896"/>
-          </a:xfrm>
-          <a:prstGeom prst="rect">
-            <a:avLst/>
-          </a:prstGeom>
-          <a:noFill/>
-          <a:ln/>
-        </p:spPr>
-        <p:txBody>
-          <a:bodyPr wrap="square" lIns="0" tIns="0" rIns="0" bIns="0" rtlCol="0" anchor="t"/>
-          <a:lstStyle/>
-          <a:p>
-            <a:pPr algn="r" indent="0" marL="0">
-              <a:buNone/>
-            </a:pPr>
-            <a:r>
-              <a:rPr lang="en-US" sz="850" i="1" dirty="0">
-                <a:solidFill>
-                  <a:srgbClr val="5B6778"/>
-                </a:solidFill>
-                <a:latin typeface="Inter" pitchFamily="34" charset="0"/>
-                <a:ea typeface="Inter" pitchFamily="34" charset="-122"/>
-                <a:cs typeface="Inter" pitchFamily="34" charset="-120"/>
-              </a:rPr>
-              <a:t>Sunday overtime not counted; with it, about 1 fewer day a year.</a:t>
-            </a:r>
-            <a:endParaRPr lang="en-US" sz="850" dirty="0"/>
-          </a:p>
-        </p:txBody>
-      </p:sp>
-      <p:sp>
-        <p:nvSpPr>
-          <p:cNvPr id="25" name="Text 23"/>
           <p:cNvSpPr txBox="1"/>
           <p:nvPr/>
         </p:nvSpPr>
@@ -10882,7 +10804,7 @@
                 <a:ea typeface="Inter" pitchFamily="34" charset="-122"/>
                 <a:cs typeface="Inter" pitchFamily="34" charset="-120"/>
               </a:rPr>
-              <a:t>Your basic pay follows your contracted hours — and they do not change</a:t>
+              <a:t>Your pay follows your contracted hours</a:t>
             </a:r>
             <a:endParaRPr lang="en-US" sz="1500" dirty="0"/>
           </a:p>
@@ -11458,7 +11380,7 @@
                 <a:ea typeface="Inter" pitchFamily="34" charset="-122"/>
                 <a:cs typeface="Inter" pitchFamily="34" charset="-120"/>
               </a:rPr>
-              <a:t>No — basic pay stays the same, plus about four more Saturdays at time and a quarter.</a:t>
+              <a:t>No. The same 35-hour week — plus about four more Saturdays at time and a quarter.</a:t>
             </a:r>
             <a:endParaRPr lang="en-US" sz="1400" dirty="0"/>
           </a:p>
@@ -11467,45 +11389,6 @@
       <p:sp>
         <p:nvSpPr>
           <p:cNvPr id="20" name="Text 18"/>
-          <p:cNvSpPr txBox="1"/>
-          <p:nvPr/>
-        </p:nvSpPr>
-        <p:spPr>
-          <a:xfrm>
-            <a:off x="4023360" y="4754880"/>
-            <a:ext cx="4663440" cy="310896"/>
-          </a:xfrm>
-          <a:prstGeom prst="rect">
-            <a:avLst/>
-          </a:prstGeom>
-          <a:noFill/>
-          <a:ln/>
-        </p:spPr>
-        <p:txBody>
-          <a:bodyPr wrap="square" lIns="0" tIns="0" rIns="0" bIns="0" rtlCol="0" anchor="t"/>
-          <a:lstStyle/>
-          <a:p>
-            <a:pPr algn="r" indent="0" marL="0">
-              <a:buNone/>
-            </a:pPr>
-            <a:r>
-              <a:rPr lang="en-US" sz="850" i="1" dirty="0">
-                <a:solidFill>
-                  <a:srgbClr val="5B6778"/>
-                </a:solidFill>
-                <a:latin typeface="Inter" pitchFamily="34" charset="0"/>
-                <a:ea typeface="Inter" pitchFamily="34" charset="-122"/>
-                <a:cs typeface="Inter" pitchFamily="34" charset="-120"/>
-              </a:rPr>
-              <a:t>Link averages, not a payslip: overtime and absence change what you earn.</a:t>
-            </a:r>
-            <a:endParaRPr lang="en-US" sz="850" dirty="0"/>
-          </a:p>
-        </p:txBody>
-      </p:sp>
-      <p:sp>
-        <p:nvSpPr>
-          <p:cNvPr id="21" name="Text 19"/>
           <p:cNvSpPr txBox="1"/>
           <p:nvPr/>
         </p:nvSpPr>
@@ -13388,45 +13271,6 @@
       <p:sp>
         <p:nvSpPr>
           <p:cNvPr id="24" name="Text 22"/>
-          <p:cNvSpPr txBox="1"/>
-          <p:nvPr/>
-        </p:nvSpPr>
-        <p:spPr>
-          <a:xfrm>
-            <a:off x="4023360" y="4754880"/>
-            <a:ext cx="4663440" cy="310896"/>
-          </a:xfrm>
-          <a:prstGeom prst="rect">
-            <a:avLst/>
-          </a:prstGeom>
-          <a:noFill/>
-          <a:ln/>
-        </p:spPr>
-        <p:txBody>
-          <a:bodyPr wrap="square" lIns="0" tIns="0" rIns="0" bIns="0" rtlCol="0" anchor="t"/>
-          <a:lstStyle/>
-          <a:p>
-            <a:pPr algn="r" indent="0" marL="0">
-              <a:buNone/>
-            </a:pPr>
-            <a:r>
-              <a:rPr lang="en-US" sz="850" i="1" dirty="0">
-                <a:solidFill>
-                  <a:srgbClr val="5B6778"/>
-                </a:solidFill>
-                <a:latin typeface="Inter" pitchFamily="34" charset="0"/>
-                <a:ea typeface="Inter" pitchFamily="34" charset="-122"/>
-                <a:cs typeface="Inter" pitchFamily="34" charset="-120"/>
-              </a:rPr>
-              <a:t>Each person, averaged across the whole link.</a:t>
-            </a:r>
-            <a:endParaRPr lang="en-US" sz="850" dirty="0"/>
-          </a:p>
-        </p:txBody>
-      </p:sp>
-      <p:sp>
-        <p:nvSpPr>
-          <p:cNvPr id="25" name="Text 23"/>
           <p:cNvSpPr txBox="1"/>
           <p:nvPr/>
         </p:nvSpPr>

--- a/docs/proposals/presentations/Familiar-Nine-for-colleagues.pptx
+++ b/docs/proposals/presentations/Familiar-Nine-for-colleagues.pptx
@@ -604,7 +604,7 @@
           <a:p>
             <a:r>
               <a:rPr lang="en-US" dirty="0"/>
-              <a:t>Earlies here means a start before 11:00. Sundays: today 8 Sunday duties across 16 working weeks, Familiar Nine 10 across 20 — the same one-in-two share.</a:t>
+              <a:t>Earlies here means a start before 11:00. Sundays: today 8 Sunday duties across 16 working weeks, Familiar Nine 10 across 20 — the same one-in-two share of working weeks. Because cover weeks come round a little less often, that is about one more Sunday a year each (22 against 21).</a:t>
             </a:r>
             <a:endParaRPr lang="en-US" dirty="0"/>
           </a:p>
@@ -1308,7 +1308,7 @@
           <a:p>
             <a:r>
               <a:rPr lang="en-US" dirty="0"/>
-              <a:t>Monday to Saturday, counting a cover week as four days worked, the same way the clerks do. Sundays are overtime by agreement, so they are not in these figures — today or in Familiar Nine. Fewer days is possible because the average shift is a few minutes longer, which is the next slide.</a:t>
+              <a:t>Monday to Saturday, counting a cover week as four days worked, the same way the clerks do. Sundays are overtime by agreement, so they are not in these figures — today or in Familiar Nine. If asked: counting Sunday overtime too, it is about one fewer day a year rather than two. 32 days is the standard CEA contract. Fewer days is possible because the average shift is a few minutes longer, which is the next slide.</a:t>
             </a:r>
             <a:endParaRPr lang="en-US" dirty="0"/>
           </a:p>
@@ -2699,7 +2699,7 @@
                 <a:ea typeface="Inter" pitchFamily="34" charset="-122"/>
                 <a:cs typeface="Inter" pitchFamily="34" charset="-120"/>
               </a:rPr>
-              <a:t>Not part of the contract, same as now — about one Sunday every other working week on the link, exactly today’s share.</a:t>
+              <a:t>Not part of the contract, same as now — and about the same number of Sundays as today.</a:t>
             </a:r>
             <a:endParaRPr lang="en-US" sz="1300" dirty="0"/>
           </a:p>
@@ -3898,7 +3898,7 @@
                 <a:ea typeface="Inter" pitchFamily="34" charset="-122"/>
                 <a:cs typeface="Inter" pitchFamily="34" charset="-120"/>
               </a:rPr>
-              <a:t>Safer on shift</a:t>
+              <a:t>More staff on the floor</a:t>
             </a:r>
             <a:endParaRPr lang="en-US" sz="3000" dirty="0"/>
           </a:p>
@@ -3937,7 +3937,7 @@
                 <a:ea typeface="Inter" pitchFamily="34" charset="-122"/>
                 <a:cs typeface="Inter" pitchFamily="34" charset="-120"/>
               </a:rPr>
-              <a:t>More colleagues around you, all day</a:t>
+              <a:t>More people on duty with you, all day</a:t>
             </a:r>
             <a:endParaRPr lang="en-US" sz="1500" dirty="0"/>
           </a:p>
@@ -4513,7 +4513,7 @@
                 <a:ea typeface="Inter" pitchFamily="34" charset="-122"/>
                 <a:cs typeface="Inter" pitchFamily="34" charset="-120"/>
               </a:rPr>
-              <a:t>ORR fatigue warning signs in the design</a:t>
+              <a:t>Avoidable tiring patterns in the rota</a:t>
             </a:r>
             <a:endParaRPr lang="en-US" sz="1400" dirty="0"/>
           </a:p>
@@ -4657,7 +4657,7 @@
                 <a:ea typeface="Inter" pitchFamily="34" charset="-122"/>
                 <a:cs typeface="Inter" pitchFamily="34" charset="-120"/>
               </a:rPr>
-              <a:t>Never fewer than three on the floor — and no fatigue warnings.</a:t>
+              <a:t>Never fewer than three on the floor, and none of the avoidable tiring patterns.</a:t>
             </a:r>
             <a:endParaRPr lang="en-US" sz="1400" dirty="0"/>
           </a:p>
@@ -6037,7 +6037,7 @@
                           <a:ea typeface="Inter" pitchFamily="34" charset="-122"/>
                           <a:cs typeface="Inter" pitchFamily="34" charset="-120"/>
                         </a:rPr>
-                        <a:t>Days at work a year</a:t>
+                        <a:t>Contracted days at work a year</a:t>
                       </a:r>
                       <a:endParaRPr lang="en-US" sz="1200" dirty="0">
                         <a:latin typeface="Inter" charset="0"/>
@@ -6723,7 +6723,7 @@
                           <a:ea typeface="Inter" pitchFamily="34" charset="-122"/>
                           <a:cs typeface="Inter" pitchFamily="34" charset="-120"/>
                         </a:rPr>
-                        <a:t>4 in 20</a:t>
+                        <a:t>4 in 20 (one in five)</a:t>
                       </a:r>
                       <a:endParaRPr lang="en-US" sz="1200" dirty="0">
                         <a:latin typeface="Inter" charset="0"/>
@@ -6791,7 +6791,7 @@
                           <a:ea typeface="Inter" pitchFamily="34" charset="-122"/>
                           <a:cs typeface="Inter" pitchFamily="34" charset="-120"/>
                         </a:rPr>
-                        <a:t>6 in 24</a:t>
+                        <a:t>6 in 24 (one in four)</a:t>
                       </a:r>
                       <a:endParaRPr lang="en-US" sz="1200" dirty="0">
                         <a:latin typeface="Inter" charset="0"/>
@@ -7685,7 +7685,7 @@
                           <a:ea typeface="Inter" pitchFamily="34" charset="-122"/>
                           <a:cs typeface="Inter" pitchFamily="34" charset="-120"/>
                         </a:rPr>
-                        <a:t>ORR fatigue warning signs</a:t>
+                        <a:t>Avoidable tiring patterns in the rota</a:t>
                       </a:r>
                       <a:endParaRPr lang="en-US" sz="1200" dirty="0">
                         <a:latin typeface="Inter" charset="0"/>
@@ -8771,7 +8771,7 @@
                 <a:ea typeface="Inter" pitchFamily="34" charset="-122"/>
                 <a:cs typeface="Inter" pitchFamily="34" charset="-120"/>
               </a:rPr>
-              <a:t>today 4 in 20</a:t>
+              <a:t>one in four, not one in five</a:t>
             </a:r>
             <a:endParaRPr lang="en-US" sz="1200" dirty="0"/>
           </a:p>
@@ -10223,7 +10223,7 @@
                 <a:ea typeface="Inter" pitchFamily="34" charset="-122"/>
                 <a:cs typeface="Inter" pitchFamily="34" charset="-120"/>
               </a:rPr>
-              <a:t>Days worked a week (on average)</a:t>
+              <a:t>Contracted days at work a week</a:t>
             </a:r>
             <a:endParaRPr lang="en-US" sz="1400" dirty="0"/>
           </a:p>
@@ -10367,7 +10367,7 @@
                 <a:ea typeface="Inter" pitchFamily="34" charset="-122"/>
                 <a:cs typeface="Inter" pitchFamily="34" charset="-120"/>
               </a:rPr>
-              <a:t>Days worked a year</a:t>
+              <a:t>Contracted days at work a year</a:t>
             </a:r>
             <a:endParaRPr lang="en-US" sz="1400" dirty="0"/>
           </a:p>
@@ -10804,7 +10804,7 @@
                 <a:ea typeface="Inter" pitchFamily="34" charset="-122"/>
                 <a:cs typeface="Inter" pitchFamily="34" charset="-120"/>
               </a:rPr>
-              <a:t>Your pay follows your contracted hours — and they do not change</a:t>
+              <a:t>Your pay follows your contracted hours</a:t>
             </a:r>
             <a:endParaRPr lang="en-US" sz="1500" dirty="0"/>
           </a:p>
@@ -11380,7 +11380,7 @@
                 <a:ea typeface="Inter" pitchFamily="34" charset="-122"/>
                 <a:cs typeface="Inter" pitchFamily="34" charset="-120"/>
               </a:rPr>
-              <a:t>No. The same basic pay, and about four more Saturdays a year at time and a quarter.</a:t>
+              <a:t>No. The same 35-hour week — plus about four more Saturdays at time and a quarter.</a:t>
             </a:r>
             <a:endParaRPr lang="en-US" sz="1400" dirty="0"/>
           </a:p>
@@ -12542,7 +12542,7 @@
                 <a:ea typeface="Inter" pitchFamily="34" charset="-122"/>
                 <a:cs typeface="Inter" pitchFamily="34" charset="-120"/>
               </a:rPr>
-              <a:t>Yes, a little — December needs more people at the close</a:t>
+              <a:t>Yes — about one extra late finish every two or three weeks</a:t>
             </a:r>
             <a:endParaRPr lang="en-US" sz="1500" dirty="0"/>
           </a:p>
@@ -13262,7 +13262,7 @@
                 <a:ea typeface="Inter" pitchFamily="34" charset="-122"/>
                 <a:cs typeface="Inter" pitchFamily="34" charset="-120"/>
               </a:rPr>
-              <a:t>About one extra late finish every two or three weeks — but every closer is shorter.</a:t>
+              <a:t>December needs more people at the close — but every closing shift is shorter.</a:t>
             </a:r>
             <a:endParaRPr lang="en-US" sz="1400" dirty="0"/>
           </a:p>

--- a/docs/proposals/presentations/Familiar-Nine-for-colleagues.pptx
+++ b/docs/proposals/presentations/Familiar-Nine-for-colleagues.pptx
@@ -692,7 +692,7 @@
           <a:p>
             <a:r>
               <a:rPr lang="en-US" dirty="0"/>
-              <a:t>Leave is only needed on working days Monday to Saturday; rest days and Sundays cost nothing. Today there is one unusual stretch of the roster where 14 days buys 30 days off — Familiar Nine spreads rest days more evenly, so its best is 28, but on average and at worst it is slightly better than today.</a:t>
+              <a:t>Leave is only needed on working days Monday to Saturday; rest days and Sundays cost nothing. Today there is one unusual stretch of the roster where 14 days buys 30 days off — Familiar Nine spreads rest days more evenly, so its best is 28. On average it is about the same, and at its worst it is never worse than today. Four full weeks off (Sunday to Saturday) takes 15 days of leave instead of 14. The exact averages depend on where you count a booking as starting, so quote them as “about the same”.</a:t>
             </a:r>
             <a:endParaRPr lang="en-US" dirty="0"/>
           </a:p>
@@ -1748,7 +1748,7 @@
           <a:p>
             <a:r>
               <a:rPr lang="en-US" dirty="0"/>
-              <a:t>A full weekend is Saturday and the following Sunday both off. Today that is 4 weekends in a 20-week cycle — one in five; Familiar Nine gives 6 in 24 — one in four. Most weeks are now a single shift time all week, so you are not bouncing between earlies and lates inside a week. Rest days nearly always come in pairs now — 22 of the 24 rest-day breaks are two days or more, against 13 of 17 today — and there are no six-day weeks (today there is one).</a:t>
+              <a:t>A full weekend is Saturday and the following Sunday both off. Today that is 4 weekends in a 20-week cycle — one in five; Familiar Nine gives 6 in 24 — one in four. Most weeks now keep the same shift time Monday to Friday, and all earlies or all lates, so you are not bouncing between earlies and lates inside a week. Rest days nearly always come in pairs now — 22 of the 24 rest-day breaks are two days or more, against 13 of 17 today — and there are no six-day weeks (today there is one).</a:t>
             </a:r>
             <a:endParaRPr lang="en-US" dirty="0"/>
           </a:p>
@@ -3428,7 +3428,7 @@
             <a:r>
               <a:rPr lang="en-US" sz="1800" b="1" dirty="0">
                 <a:solidFill>
-                  <a:srgbClr val="1E7B4B"/>
+                  <a:srgbClr val="001E3C"/>
                 </a:solidFill>
                 <a:latin typeface="Inter" pitchFamily="34" charset="0"/>
                 <a:ea typeface="Inter" pitchFamily="34" charset="-122"/>
@@ -5121,7 +5121,7 @@
                 <a:ea typeface="Inter" pitchFamily="34" charset="-122"/>
                 <a:cs typeface="Inter" pitchFamily="34" charset="-120"/>
               </a:rPr>
-              <a:t>The average and the worst are both slightly better.</a:t>
+              <a:t>On average and at worst, about the same as today.</a:t>
             </a:r>
             <a:endParaRPr lang="en-US" sz="1250" dirty="0"/>
           </a:p>
@@ -9659,7 +9659,7 @@
                 <a:ea typeface="Inter" pitchFamily="34" charset="-122"/>
                 <a:cs typeface="Inter" pitchFamily="34" charset="-120"/>
               </a:rPr>
-              <a:t>14 on duty every weekday and every Saturday, 10 on a Sunday.</a:t>
+              <a:t>At least 14 on a Saturday and 10 on a Sunday, and more at the open and the close.</a:t>
             </a:r>
             <a:endParaRPr lang="en-US" sz="1300" dirty="0"/>
           </a:p>
@@ -14048,7 +14048,7 @@
                 <a:ea typeface="Inter" pitchFamily="34" charset="-122"/>
                 <a:cs typeface="Inter" pitchFamily="34" charset="-120"/>
               </a:rPr>
-              <a:t>Fewer times to learn than today (15, not 18) — most new ones are a small nudge.</a:t>
+              <a:t>Fewer shift times than today (15, not 18) — and most new ones are a small nudge.</a:t>
             </a:r>
             <a:endParaRPr lang="en-US" sz="1400" dirty="0"/>
           </a:p>
@@ -14917,7 +14917,7 @@
                 <a:ea typeface="Inter" pitchFamily="34" charset="-122"/>
                 <a:cs typeface="Inter" pitchFamily="34" charset="-120"/>
               </a:rPr>
-              <a:t>Weeks on one shift time all week</a:t>
+              <a:t>Weeks on the same shift time Monday to Friday</a:t>
             </a:r>
             <a:endParaRPr lang="en-US" sz="1400" dirty="0"/>
           </a:p>

--- a/docs/proposals/presentations/Familiar-Nine-for-colleagues.pptx
+++ b/docs/proposals/presentations/Familiar-Nine-for-colleagues.pptx
@@ -780,7 +780,7 @@
           <a:p>
             <a:r>
               <a:rPr lang="en-US" dirty="0"/>
-              <a:t>The Office of Rail and Road publishes a list of rota patterns that tend to tire people. Today’s link shows five of them; Familiar Nine shows none. Two more — early starts and a weekly rotation — come with every weekly link at a 06:20 station, so they are listed on the sheet for information but not counted against any design.</a:t>
+              <a:t>The Office of Rail and Road and the rail industry publish lists of rota patterns that tend to tire people. Today’s link shows five of them; Familiar Nine shows none. Two more — early starts and a weekly rotation — come with every weekly link at a 06:20 station, so they are listed on the sheet for information but not counted against any design.</a:t>
             </a:r>
             <a:endParaRPr lang="en-US" dirty="0"/>
           </a:p>
@@ -1044,7 +1044,7 @@
           <a:p>
             <a:r>
               <a:rPr lang="en-US" dirty="0"/>
-              <a:t>Hand out or point people at the ten-page proposal sheet. Collect questions — the ones nobody asks in the room are usually about a particular week, so encourage people to look up the line they would start on.</a:t>
+              <a:t>Hand out or point people at the nine-page proposal sheet. Collect questions — the ones nobody asks in the room are usually about a particular week, so encourage people to look up the line they would start on.</a:t>
             </a:r>
             <a:endParaRPr lang="en-US" dirty="0"/>
           </a:p>
@@ -2853,7 +2853,7 @@
                 <a:ea typeface="Inter" pitchFamily="34" charset="-122"/>
                 <a:cs typeface="Inter" pitchFamily="34" charset="-120"/>
               </a:rPr>
-              <a:t>The Sunday finish stays where it is. That is agreed practice and will remain so.</a:t>
+              <a:t>The Sunday finish stays where it is today, which is the agreed practice.</a:t>
             </a:r>
             <a:endParaRPr lang="en-US" sz="1300" dirty="0"/>
           </a:p>
@@ -8223,7 +8223,7 @@
                 <a:ea typeface="Inter" pitchFamily="34" charset="-122"/>
                 <a:cs typeface="Inter" pitchFamily="34" charset="-120"/>
               </a:rPr>
-              <a:t>Familiar Nine · F9-24-K31 · every figure worked out from the rota by the Marylebone Roster app</a:t>
+              <a:t>Familiar Nine · F9-24-K31 · every figure worked out from the rota itself</a:t>
             </a:r>
             <a:endParaRPr lang="en-US" sz="1200" dirty="0"/>
           </a:p>
@@ -14917,7 +14917,7 @@
                 <a:ea typeface="Inter" pitchFamily="34" charset="-122"/>
                 <a:cs typeface="Inter" pitchFamily="34" charset="-120"/>
               </a:rPr>
-              <a:t>Weeks on the same shift time Monday to Friday</a:t>
+              <a:t>Weeks on one shift time — all earlies or all lates</a:t>
             </a:r>
             <a:endParaRPr lang="en-US" sz="1400" dirty="0"/>
           </a:p>

--- a/docs/proposals/presentations/Familiar-Nine-for-colleagues.pptx
+++ b/docs/proposals/presentations/Familiar-Nine-for-colleagues.pptx
@@ -780,7 +780,7 @@
           <a:p>
             <a:r>
               <a:rPr lang="en-US" dirty="0"/>
-              <a:t>The Office of Rail and Road and the rail industry publish lists of rota patterns that tend to tire people. Today’s link shows five of them; Familiar Nine shows none. Two more — early starts and a weekly rotation — come with every weekly link at a 06:20 station, so they are listed on the sheet for information but not counted against any design.</a:t>
+              <a:t>The Office of Rail and Road publishes a list of rota patterns that tend to tire people. Today’s link shows five of them; Familiar Nine shows none. Two more — early starts and a weekly rotation — come with every weekly link at a 06:20 station, so they are listed on the sheet for information but not counted against any design.</a:t>
             </a:r>
             <a:endParaRPr lang="en-US" dirty="0"/>
           </a:p>
@@ -1044,7 +1044,7 @@
           <a:p>
             <a:r>
               <a:rPr lang="en-US" dirty="0"/>
-              <a:t>Hand out or point people at the nine-page proposal sheet. Collect questions — the ones nobody asks in the room are usually about a particular week, so encourage people to look up the line they would start on.</a:t>
+              <a:t>Hand out or point people at the eight-page proposal sheet. Collect questions — the ones nobody asks in the room are usually about a particular week, so encourage people to look up the line they would start on.</a:t>
             </a:r>
             <a:endParaRPr lang="en-US" dirty="0"/>
           </a:p>
@@ -2853,7 +2853,7 @@
                 <a:ea typeface="Inter" pitchFamily="34" charset="-122"/>
                 <a:cs typeface="Inter" pitchFamily="34" charset="-120"/>
               </a:rPr>
-              <a:t>The Sunday finish stays where it is today, which is the agreed practice.</a:t>
+              <a:t>The Sunday finish stays where it is. That is agreed practice and will remain so.</a:t>
             </a:r>
             <a:endParaRPr lang="en-US" sz="1300" dirty="0"/>
           </a:p>
@@ -8140,7 +8140,7 @@
                 <a:ea typeface="Inter" pitchFamily="34" charset="-122"/>
                 <a:cs typeface="Inter" pitchFamily="34" charset="-120"/>
               </a:rPr>
-              <a:t>Look at the full proposal sheet — page 4 shows every week of the link</a:t>
+              <a:t>Look at the full proposal sheet — page 3 shows every week of the link</a:t>
             </a:r>
             <a:endParaRPr lang="en-US" sz="1800" dirty="0"/>
           </a:p>
@@ -8223,7 +8223,7 @@
                 <a:ea typeface="Inter" pitchFamily="34" charset="-122"/>
                 <a:cs typeface="Inter" pitchFamily="34" charset="-120"/>
               </a:rPr>
-              <a:t>Familiar Nine · F9-24-K31 · every figure worked out from the rota itself</a:t>
+              <a:t>Familiar Nine · F9-24-K31 · every figure worked out from the rota by the Marylebone Roster app</a:t>
             </a:r>
             <a:endParaRPr lang="en-US" sz="1200" dirty="0"/>
           </a:p>
@@ -14917,7 +14917,7 @@
                 <a:ea typeface="Inter" pitchFamily="34" charset="-122"/>
                 <a:cs typeface="Inter" pitchFamily="34" charset="-120"/>
               </a:rPr>
-              <a:t>Weeks on one shift time — all earlies or all lates</a:t>
+              <a:t>Weeks on the same shift time Monday to Friday</a:t>
             </a:r>
             <a:endParaRPr lang="en-US" sz="1400" dirty="0"/>
           </a:p>

--- a/docs/proposals/presentations/Familiar-Nine-for-colleagues.pptx
+++ b/docs/proposals/presentations/Familiar-Nine-for-colleagues.pptx
@@ -1044,7 +1044,7 @@
           <a:p>
             <a:r>
               <a:rPr lang="en-US" dirty="0"/>
-              <a:t>Hand out or point people at the ten-page proposal sheet. Collect questions — the ones nobody asks in the room are usually about a particular week, so encourage people to look up the line they would start on.</a:t>
+              <a:t>Hand out or point people at the eight-page proposal sheet. Collect questions — the ones nobody asks in the room are usually about a particular week, so encourage people to look up the line they would start on.</a:t>
             </a:r>
             <a:endParaRPr lang="en-US" dirty="0"/>
           </a:p>
@@ -8140,7 +8140,7 @@
                 <a:ea typeface="Inter" pitchFamily="34" charset="-122"/>
                 <a:cs typeface="Inter" pitchFamily="34" charset="-120"/>
               </a:rPr>
-              <a:t>Look at the full proposal sheet — page 4 shows every week of the link</a:t>
+              <a:t>Look at the full proposal sheet — page 3 shows every week of the link</a:t>
             </a:r>
             <a:endParaRPr lang="en-US" sz="1800" dirty="0"/>
           </a:p>

--- a/docs/proposals/presentations/Familiar-Nine-for-colleagues.pptx
+++ b/docs/proposals/presentations/Familiar-Nine-for-colleagues.pptx
@@ -1308,7 +1308,7 @@
           <a:p>
             <a:r>
               <a:rPr lang="en-US" dirty="0"/>
-              <a:t>Monday to Saturday, counting a cover week as four days worked, the same way the clerks do. Sundays are overtime by agreement, so they are not in these figures — today or in Familiar Nine. If asked: counting Sunday overtime too, it is about one fewer day a year rather than two. 32 days is the standard CEA contract. Fewer days is possible because the average shift is a few minutes longer, which is the next slide.</a:t>
+              <a:t>Monday to Saturday, counting a cover week as four days worked, the same way the clerks do. Sundays are overtime by agreement, so they are not in these figures — today or in Familiar Nine. If asked: counting Sunday overtime too, it is about one fewer day a year rather than two. Fewer days is possible because the average shift is a few minutes longer, which is the next slide.</a:t>
             </a:r>
             <a:endParaRPr lang="en-US" dirty="0"/>
           </a:p>
@@ -1396,7 +1396,7 @@
           <a:p>
             <a:r>
               <a:rPr lang="en-US" dirty="0"/>
-              <a:t>Basic pay follows the 35-hour week, which does not change. Saturdays in the contract are paid at time and a quarter, and on average a person is rostered about 30 a year instead of 26. Sundays stay overtime: 10 a week shared among 24 people instead of 8 among 20, so about the same each. These are averages across the whole link — your own depends on which line you start on — and they are not a payslip; the Pay Calculator in the app does that.</a:t>
+              <a:t>Basic pay follows the 35-hour week, which is what this slide answers; overtime and premium duties vary person to person. The Saturday and Sunday counts are the link’s fixed duties and leave out anything later given in a cover week. Basic pay follows the 35-hour week, which does not change. Saturdays in the contract are paid at time and a quarter, and on average a person is rostered about 30 a year instead of 26. Sundays stay overtime: 10 a week shared among 24 people instead of 8 among 20, so about the same each. These are averages across the whole link — your own depends on which line you start on — and they are not a payslip; the Pay Calculator in the app does that.</a:t>
             </a:r>
             <a:endParaRPr lang="en-US" dirty="0"/>
           </a:p>
@@ -10459,150 +10459,6 @@
         </p:nvSpPr>
         <p:spPr>
           <a:xfrm>
-            <a:off x="457200" y="3502152"/>
-            <a:ext cx="8229600" cy="475488"/>
-          </a:xfrm>
-          <a:prstGeom prst="roundRect">
-            <a:avLst>
-              <a:gd name="adj" fmla="val 11538"/>
-            </a:avLst>
-          </a:prstGeom>
-          <a:solidFill>
-            <a:srgbClr val="FFFFFF"/>
-          </a:solidFill>
-          <a:ln w="12700">
-            <a:solidFill>
-              <a:srgbClr val="DDE3EA"/>
-            </a:solidFill>
-            <a:prstDash val="solid"/>
-          </a:ln>
-        </p:spPr>
-      </p:sp>
-      <p:sp>
-        <p:nvSpPr>
-          <p:cNvPr id="19" name="Text 17"/>
-          <p:cNvSpPr txBox="1"/>
-          <p:nvPr/>
-        </p:nvSpPr>
-        <p:spPr>
-          <a:xfrm>
-            <a:off x="640080" y="3502152"/>
-            <a:ext cx="3657600" cy="475488"/>
-          </a:xfrm>
-          <a:prstGeom prst="rect">
-            <a:avLst/>
-          </a:prstGeom>
-          <a:noFill/>
-          <a:ln/>
-        </p:spPr>
-        <p:txBody>
-          <a:bodyPr wrap="square" lIns="0" tIns="0" rIns="0" bIns="0" rtlCol="0" anchor="ctr"/>
-          <a:lstStyle/>
-          <a:p>
-            <a:pPr indent="0" marL="0">
-              <a:buNone/>
-            </a:pPr>
-            <a:r>
-              <a:rPr lang="en-US" sz="1400" dirty="0">
-                <a:solidFill>
-                  <a:srgbClr val="1B2533"/>
-                </a:solidFill>
-                <a:latin typeface="Inter" pitchFamily="34" charset="0"/>
-                <a:ea typeface="Inter" pitchFamily="34" charset="-122"/>
-                <a:cs typeface="Inter" pitchFamily="34" charset="-120"/>
-              </a:rPr>
-              <a:t>… after 32 days’ annual leave</a:t>
-            </a:r>
-            <a:endParaRPr lang="en-US" sz="1400" dirty="0"/>
-          </a:p>
-        </p:txBody>
-      </p:sp>
-      <p:sp>
-        <p:nvSpPr>
-          <p:cNvPr id="20" name="Text 18"/>
-          <p:cNvSpPr txBox="1"/>
-          <p:nvPr/>
-        </p:nvSpPr>
-        <p:spPr>
-          <a:xfrm>
-            <a:off x="4297680" y="3502152"/>
-            <a:ext cx="2194560" cy="475488"/>
-          </a:xfrm>
-          <a:prstGeom prst="rect">
-            <a:avLst/>
-          </a:prstGeom>
-          <a:noFill/>
-          <a:ln/>
-        </p:spPr>
-        <p:txBody>
-          <a:bodyPr wrap="square" lIns="0" tIns="0" rIns="0" bIns="0" rtlCol="0" anchor="ctr"/>
-          <a:lstStyle/>
-          <a:p>
-            <a:pPr algn="ctr" indent="0" marL="0">
-              <a:buNone/>
-            </a:pPr>
-            <a:r>
-              <a:rPr lang="en-US" sz="1600" dirty="0">
-                <a:solidFill>
-                  <a:srgbClr val="5B6778"/>
-                </a:solidFill>
-                <a:latin typeface="Inter" pitchFamily="34" charset="0"/>
-                <a:ea typeface="Inter" pitchFamily="34" charset="-122"/>
-                <a:cs typeface="Inter" pitchFamily="34" charset="-120"/>
-              </a:rPr>
-              <a:t>187</a:t>
-            </a:r>
-            <a:endParaRPr lang="en-US" sz="1600" dirty="0"/>
-          </a:p>
-        </p:txBody>
-      </p:sp>
-      <p:sp>
-        <p:nvSpPr>
-          <p:cNvPr id="21" name="Text 19"/>
-          <p:cNvSpPr txBox="1"/>
-          <p:nvPr/>
-        </p:nvSpPr>
-        <p:spPr>
-          <a:xfrm>
-            <a:off x="6492240" y="3502152"/>
-            <a:ext cx="2194560" cy="475488"/>
-          </a:xfrm>
-          <a:prstGeom prst="rect">
-            <a:avLst/>
-          </a:prstGeom>
-          <a:noFill/>
-          <a:ln/>
-        </p:spPr>
-        <p:txBody>
-          <a:bodyPr wrap="square" lIns="0" tIns="0" rIns="0" bIns="0" rtlCol="0" anchor="ctr"/>
-          <a:lstStyle/>
-          <a:p>
-            <a:pPr algn="ctr" indent="0" marL="0">
-              <a:buNone/>
-            </a:pPr>
-            <a:r>
-              <a:rPr lang="en-US" sz="1800" b="1" dirty="0">
-                <a:solidFill>
-                  <a:srgbClr val="1E7B4B"/>
-                </a:solidFill>
-                <a:latin typeface="Inter" pitchFamily="34" charset="0"/>
-                <a:ea typeface="Inter" pitchFamily="34" charset="-122"/>
-                <a:cs typeface="Inter" pitchFamily="34" charset="-120"/>
-              </a:rPr>
-              <a:t>185</a:t>
-            </a:r>
-            <a:endParaRPr lang="en-US" sz="1800" dirty="0"/>
-          </a:p>
-        </p:txBody>
-      </p:sp>
-      <p:sp>
-        <p:nvSpPr>
-          <p:cNvPr id="22" name="Shape 20"/>
-          <p:cNvSpPr/>
-          <p:nvPr/>
-        </p:nvSpPr>
-        <p:spPr>
-          <a:xfrm>
             <a:off x="457200" y="4160520"/>
             <a:ext cx="8229600" cy="548640"/>
           </a:xfrm>
@@ -10624,7 +10480,7 @@
       </p:sp>
       <p:sp>
         <p:nvSpPr>
-          <p:cNvPr id="23" name="Text 21"/>
+          <p:cNvPr id="19" name="Text 17"/>
           <p:cNvSpPr txBox="1"/>
           <p:nvPr/>
         </p:nvSpPr>
@@ -10663,7 +10519,7 @@
       </p:sp>
       <p:sp>
         <p:nvSpPr>
-          <p:cNvPr id="24" name="Text 22"/>
+          <p:cNvPr id="20" name="Text 18"/>
           <p:cNvSpPr txBox="1"/>
           <p:nvPr/>
         </p:nvSpPr>
@@ -10765,7 +10621,7 @@
                 <a:ea typeface="Inter" pitchFamily="34" charset="-122"/>
                 <a:cs typeface="Inter" pitchFamily="34" charset="-120"/>
               </a:rPr>
-              <a:t>Will I be paid less?</a:t>
+              <a:t>Will my basic pay change?</a:t>
             </a:r>
             <a:endParaRPr lang="en-US" sz="3000" dirty="0"/>
           </a:p>
@@ -10804,7 +10660,7 @@
                 <a:ea typeface="Inter" pitchFamily="34" charset="-122"/>
                 <a:cs typeface="Inter" pitchFamily="34" charset="-120"/>
               </a:rPr>
-              <a:t>Your pay follows your contracted hours</a:t>
+              <a:t>Basic pay follows your contracted hours</a:t>
             </a:r>
             <a:endParaRPr lang="en-US" sz="1500" dirty="0"/>
           </a:p>

--- a/docs/proposals/presentations/Familiar-Nine-for-colleagues.pptx
+++ b/docs/proposals/presentations/Familiar-Nine-for-colleagues.pptx
@@ -1132,7 +1132,7 @@
           <a:p>
             <a:r>
               <a:rPr lang="en-US" dirty="0"/>
-              <a:t>This is the whole pitch on one slide. Same 35-hour week as now. Never more than six days in a row. One full weekend off in every four weeks, against one in five today. Nine of the fifteen shift times are ones people already work. And every closing shift is shorter: the weekday and Saturday closers by 30 minutes, the Sunday closer by 45.</a:t>
+              <a:t>This is the whole pitch on one slide. Same 35-hour week as now. Never more than six days in a row. One full weekend off in every four weeks, against one in five today. Eight of the sixteen shift times are ones people already work. And every closing shift is shorter: the weekday and Saturday closers by 30 minutes, the Sunday closer by 45.</a:t>
             </a:r>
             <a:endParaRPr lang="en-US" dirty="0"/>
           </a:p>
@@ -1660,7 +1660,7 @@
           <a:p>
             <a:r>
               <a:rPr lang="en-US" dirty="0"/>
-              <a:t>Familiar Nine was built specifically to keep the times people already work wherever that cost little. Nine of its fifteen are worked today, and it uses fewer different times overall than today’s eighteen.</a:t>
+              <a:t>Familiar Nine was built specifically to keep the times people already work wherever that cost little. Eight of its sixteen are worked today, and it uses fewer different times overall than today’s eighteen.</a:t>
             </a:r>
             <a:endParaRPr lang="en-US" dirty="0"/>
           </a:p>
@@ -2281,7 +2281,7 @@
                 <a:ea typeface="Inter" pitchFamily="34" charset="-122"/>
                 <a:cs typeface="Inter" pitchFamily="34" charset="-120"/>
               </a:rPr>
-              <a:t>A proposal for discussion · CEA link · 24 weeks · code F9-24-K31</a:t>
+              <a:t>A proposal for discussion · CEA link · 24 weeks · code F9-24-K31s</a:t>
             </a:r>
             <a:endParaRPr lang="en-US" sz="1300" dirty="0"/>
           </a:p>
@@ -4872,7 +4872,7 @@
                 <a:ea typeface="Inter" pitchFamily="34" charset="-122"/>
                 <a:cs typeface="Inter" pitchFamily="34" charset="-120"/>
               </a:rPr>
-              <a:t>Six new shift times to learn</a:t>
+              <a:t>Eight new shift times to learn</a:t>
             </a:r>
             <a:endParaRPr lang="en-US" sz="1400" dirty="0"/>
           </a:p>
@@ -7409,7 +7409,7 @@
                           <a:ea typeface="Inter" pitchFamily="34" charset="-122"/>
                           <a:cs typeface="Inter" pitchFamily="34" charset="-120"/>
                         </a:rPr>
-                        <a:t>15 (9 you know)</a:t>
+                        <a:t>16 (8 you know)</a:t>
                       </a:r>
                       <a:endParaRPr lang="en-US" sz="1200" dirty="0">
                         <a:latin typeface="Inter" charset="0"/>
@@ -8223,7 +8223,7 @@
                 <a:ea typeface="Inter" pitchFamily="34" charset="-122"/>
                 <a:cs typeface="Inter" pitchFamily="34" charset="-120"/>
               </a:rPr>
-              <a:t>Familiar Nine · F9-24-K31 · every figure worked out from the rota by the Marylebone Roster app</a:t>
+              <a:t>Familiar Nine · F9-24-K31s · every figure worked out from the rota by the Marylebone Roster app</a:t>
             </a:r>
             <a:endParaRPr lang="en-US" sz="1200" dirty="0"/>
           </a:p>
@@ -8839,7 +8839,7 @@
                 <a:ea typeface="Inter" pitchFamily="34" charset="-122"/>
                 <a:cs typeface="Inter" pitchFamily="34" charset="-120"/>
               </a:rPr>
-              <a:t>9 of 15</a:t>
+              <a:t>8 of 16</a:t>
             </a:r>
             <a:endParaRPr lang="en-US" sz="3000" dirty="0"/>
           </a:p>
@@ -8917,7 +8917,7 @@
                 <a:ea typeface="Inter" pitchFamily="34" charset="-122"/>
                 <a:cs typeface="Inter" pitchFamily="34" charset="-120"/>
               </a:rPr>
-              <a:t>only 6 new ones</a:t>
+              <a:t>8 new ones</a:t>
             </a:r>
             <a:endParaRPr lang="en-US" sz="1200" dirty="0"/>
           </a:p>
@@ -13267,7 +13267,7 @@
                 <a:ea typeface="Inter" pitchFamily="34" charset="-122"/>
                 <a:cs typeface="Inter" pitchFamily="34" charset="-120"/>
               </a:rPr>
-              <a:t>15 shift times in all — 9 of them you already work</a:t>
+              <a:t>16 shift times in all — 8 of them you already work</a:t>
             </a:r>
             <a:endParaRPr lang="en-US" sz="1500" dirty="0"/>
           </a:p>
@@ -13382,7 +13382,7 @@
                 <a:ea typeface="Inter" pitchFamily="34" charset="-122"/>
                 <a:cs typeface="Inter" pitchFamily="34" charset="-120"/>
               </a:rPr>
-              <a:t>You work these today (9)</a:t>
+              <a:t>You work these today (8)</a:t>
             </a:r>
             <a:endParaRPr lang="en-US" sz="1500" dirty="0"/>
           </a:p>
@@ -13446,7 +13446,7 @@
                 <a:ea typeface="Inter" pitchFamily="34" charset="-122"/>
                 <a:cs typeface="Inter" pitchFamily="34" charset="-120"/>
               </a:rPr>
-              <a:t>06:20–14:50 · 08:30–16:30</a:t>
+              <a:t>06:20–14:50 · 13:30–21:00</a:t>
             </a:r>
             <a:endParaRPr lang="en-US" sz="1200" dirty="0"/>
           </a:p>
@@ -13467,7 +13467,7 @@
                 <a:ea typeface="Inter" pitchFamily="34" charset="-122"/>
                 <a:cs typeface="Inter" pitchFamily="34" charset="-120"/>
               </a:rPr>
-              <a:t>13:30–21:00 · 14:00–22:30</a:t>
+              <a:t>14:00–22:30 · 14:30–22:00</a:t>
             </a:r>
             <a:endParaRPr lang="en-US" sz="1200" dirty="0"/>
           </a:p>
@@ -13488,28 +13488,7 @@
                 <a:ea typeface="Inter" pitchFamily="34" charset="-122"/>
                 <a:cs typeface="Inter" pitchFamily="34" charset="-120"/>
               </a:rPr>
-              <a:t>14:30–22:00 · 14:30–23:25</a:t>
-            </a:r>
-            <a:endParaRPr lang="en-US" sz="1200" dirty="0"/>
-          </a:p>
-          <a:p>
-            <a:pPr marL="342900" indent="-342900">
-              <a:spcAft>
-                <a:spcPts val="200"/>
-              </a:spcAft>
-              <a:buSzPct val="100000"/>
-              <a:buChar char="•"/>
-            </a:pPr>
-            <a:r>
-              <a:rPr lang="en-US" sz="1200" dirty="0">
-                <a:solidFill>
-                  <a:srgbClr val="1B2533"/>
-                </a:solidFill>
-                <a:latin typeface="Inter" pitchFamily="34" charset="0"/>
-                <a:ea typeface="Inter" pitchFamily="34" charset="-122"/>
-                <a:cs typeface="Inter" pitchFamily="34" charset="-120"/>
-              </a:rPr>
-              <a:t>15:15–23:55</a:t>
+              <a:t>14:30–23:25 · 15:15–23:55</a:t>
             </a:r>
             <a:endParaRPr lang="en-US" sz="1200" dirty="0"/>
           </a:p>
@@ -13624,7 +13603,7 @@
                 <a:ea typeface="Inter" pitchFamily="34" charset="-122"/>
                 <a:cs typeface="Inter" pitchFamily="34" charset="-120"/>
               </a:rPr>
-              <a:t>New times (6)</a:t>
+              <a:t>New times (8)</a:t>
             </a:r>
             <a:endParaRPr lang="en-US" sz="1500" dirty="0"/>
           </a:p>
@@ -13658,7 +13637,7 @@
               <a:buNone/>
             </a:pPr>
             <a:r>
-              <a:rPr lang="en-US" sz="1200" b="1" dirty="0">
+              <a:rPr lang="en-US" sz="1050" b="1" dirty="0">
                 <a:solidFill>
                   <a:srgbClr val="001E3C"/>
                 </a:solidFill>
@@ -13668,18 +13647,18 @@
               </a:rPr>
               <a:t>Weekdays</a:t>
             </a:r>
-            <a:endParaRPr lang="en-US" sz="1200" dirty="0"/>
+            <a:endParaRPr lang="en-US" sz="1050" dirty="0"/>
           </a:p>
           <a:p>
             <a:pPr marL="342900" indent="-342900">
               <a:spcAft>
-                <a:spcPts val="200"/>
+                <a:spcPts val="100"/>
               </a:spcAft>
               <a:buSzPct val="100000"/>
               <a:buChar char="•"/>
             </a:pPr>
             <a:r>
-              <a:rPr lang="en-US" sz="1200" dirty="0">
+              <a:rPr lang="en-US" sz="1050" dirty="0">
                 <a:solidFill>
                   <a:srgbClr val="1B2533"/>
                 </a:solidFill>
@@ -13689,18 +13668,18 @@
               </a:rPr>
               <a:t>07:00–16:00 — a new early</a:t>
             </a:r>
-            <a:endParaRPr lang="en-US" sz="1200" dirty="0"/>
+            <a:endParaRPr lang="en-US" sz="1050" dirty="0"/>
           </a:p>
           <a:p>
             <a:pPr marL="342900" indent="-342900">
               <a:spcAft>
-                <a:spcPts val="200"/>
+                <a:spcPts val="100"/>
               </a:spcAft>
               <a:buSzPct val="100000"/>
               <a:buChar char="•"/>
             </a:pPr>
             <a:r>
-              <a:rPr lang="en-US" sz="1200" dirty="0">
+              <a:rPr lang="en-US" sz="1050" dirty="0">
                 <a:solidFill>
                   <a:srgbClr val="1B2533"/>
                 </a:solidFill>
@@ -13710,7 +13689,7 @@
               </a:rPr>
               <a:t>15:45–23:55 — the closer, 30 minutes later than 15:15</a:t>
             </a:r>
-            <a:endParaRPr lang="en-US" sz="1200" dirty="0"/>
+            <a:endParaRPr lang="en-US" sz="1050" dirty="0"/>
           </a:p>
           <a:p>
             <a:pPr indent="0" marL="0">
@@ -13723,7 +13702,7 @@
               <a:buNone/>
             </a:pPr>
             <a:r>
-              <a:rPr lang="en-US" sz="1200" b="1" dirty="0">
+              <a:rPr lang="en-US" sz="1050" b="1" dirty="0">
                 <a:solidFill>
                   <a:srgbClr val="001E3C"/>
                 </a:solidFill>
@@ -13733,18 +13712,18 @@
               </a:rPr>
               <a:t>Saturday</a:t>
             </a:r>
-            <a:endParaRPr lang="en-US" sz="1200" dirty="0"/>
+            <a:endParaRPr lang="en-US" sz="1050" dirty="0"/>
           </a:p>
           <a:p>
             <a:pPr marL="342900" indent="-342900">
               <a:spcAft>
-                <a:spcPts val="200"/>
+                <a:spcPts val="100"/>
               </a:spcAft>
               <a:buSzPct val="100000"/>
               <a:buChar char="•"/>
             </a:pPr>
             <a:r>
-              <a:rPr lang="en-US" sz="1200" dirty="0">
+              <a:rPr lang="en-US" sz="1050" dirty="0">
                 <a:solidFill>
                   <a:srgbClr val="1B2533"/>
                 </a:solidFill>
@@ -13754,18 +13733,18 @@
               </a:rPr>
               <a:t>06:20–15:00 — ten minutes on from 06:20–14:50</a:t>
             </a:r>
-            <a:endParaRPr lang="en-US" sz="1200" dirty="0"/>
+            <a:endParaRPr lang="en-US" sz="1050" dirty="0"/>
           </a:p>
           <a:p>
             <a:pPr marL="342900" indent="-342900">
               <a:spcAft>
-                <a:spcPts val="200"/>
+                <a:spcPts val="100"/>
               </a:spcAft>
               <a:buSzPct val="100000"/>
               <a:buChar char="•"/>
             </a:pPr>
             <a:r>
-              <a:rPr lang="en-US" sz="1200" dirty="0">
+              <a:rPr lang="en-US" sz="1050" dirty="0">
                 <a:solidFill>
                   <a:srgbClr val="1B2533"/>
                 </a:solidFill>
@@ -13775,7 +13754,7 @@
               </a:rPr>
               <a:t>07:30–16:30 — a new early</a:t>
             </a:r>
-            <a:endParaRPr lang="en-US" sz="1200" dirty="0"/>
+            <a:endParaRPr lang="en-US" sz="1050" dirty="0"/>
           </a:p>
           <a:p>
             <a:pPr indent="0" marL="0">
@@ -13788,7 +13767,7 @@
               <a:buNone/>
             </a:pPr>
             <a:r>
-              <a:rPr lang="en-US" sz="1200" b="1" dirty="0">
+              <a:rPr lang="en-US" sz="1050" b="1" dirty="0">
                 <a:solidFill>
                   <a:srgbClr val="001E3C"/>
                 </a:solidFill>
@@ -13798,18 +13777,18 @@
               </a:rPr>
               <a:t>Sunday</a:t>
             </a:r>
-            <a:endParaRPr lang="en-US" sz="1200" dirty="0"/>
+            <a:endParaRPr lang="en-US" sz="1050" dirty="0"/>
           </a:p>
           <a:p>
             <a:pPr marL="342900" indent="-342900">
               <a:spcAft>
-                <a:spcPts val="200"/>
+                <a:spcPts val="100"/>
               </a:spcAft>
               <a:buSzPct val="100000"/>
               <a:buChar char="•"/>
             </a:pPr>
             <a:r>
-              <a:rPr lang="en-US" sz="1200" dirty="0">
+              <a:rPr lang="en-US" sz="1050" dirty="0">
                 <a:solidFill>
                   <a:srgbClr val="1B2533"/>
                 </a:solidFill>
@@ -13819,18 +13798,18 @@
               </a:rPr>
               <a:t>07:15–15:30 — the opener, 15 minutes shorter</a:t>
             </a:r>
-            <a:endParaRPr lang="en-US" sz="1200" dirty="0"/>
+            <a:endParaRPr lang="en-US" sz="1050" dirty="0"/>
           </a:p>
           <a:p>
             <a:pPr marL="342900" indent="-342900">
               <a:spcAft>
-                <a:spcPts val="200"/>
+                <a:spcPts val="100"/>
               </a:spcAft>
               <a:buSzPct val="100000"/>
               <a:buChar char="•"/>
             </a:pPr>
             <a:r>
-              <a:rPr lang="en-US" sz="1200" dirty="0">
+              <a:rPr lang="en-US" sz="1050" dirty="0">
                 <a:solidFill>
                   <a:srgbClr val="1B2533"/>
                 </a:solidFill>
@@ -13840,7 +13819,49 @@
               </a:rPr>
               <a:t>15:15–23:25 — the closer, 45 minutes later than 14:30</a:t>
             </a:r>
-            <a:endParaRPr lang="en-US" sz="1200" dirty="0"/>
+            <a:endParaRPr lang="en-US" sz="1050" dirty="0"/>
+          </a:p>
+          <a:p>
+            <a:pPr marL="342900" indent="-342900">
+              <a:spcAft>
+                <a:spcPts val="100"/>
+              </a:spcAft>
+              <a:buSzPct val="100000"/>
+              <a:buChar char="•"/>
+            </a:pPr>
+            <a:r>
+              <a:rPr lang="en-US" sz="1050" dirty="0">
+                <a:solidFill>
+                  <a:srgbClr val="1B2533"/>
+                </a:solidFill>
+                <a:latin typeface="Inter" pitchFamily="34" charset="0"/>
+                <a:ea typeface="Inter" pitchFamily="34" charset="-122"/>
+                <a:cs typeface="Inter" pitchFamily="34" charset="-120"/>
+              </a:rPr>
+              <a:t>09:00–18:00 — a new mid-day shift</a:t>
+            </a:r>
+            <a:endParaRPr lang="en-US" sz="1050" dirty="0"/>
+          </a:p>
+          <a:p>
+            <a:pPr marL="342900" indent="-342900">
+              <a:spcAft>
+                <a:spcPts val="100"/>
+              </a:spcAft>
+              <a:buSzPct val="100000"/>
+              <a:buChar char="•"/>
+            </a:pPr>
+            <a:r>
+              <a:rPr lang="en-US" sz="1050" dirty="0">
+                <a:solidFill>
+                  <a:srgbClr val="1B2533"/>
+                </a:solidFill>
+                <a:latin typeface="Inter" pitchFamily="34" charset="0"/>
+                <a:ea typeface="Inter" pitchFamily="34" charset="-122"/>
+                <a:cs typeface="Inter" pitchFamily="34" charset="-120"/>
+              </a:rPr>
+              <a:t>14:30–22:30 — the ticket-office late</a:t>
+            </a:r>
+            <a:endParaRPr lang="en-US" sz="1050" dirty="0"/>
           </a:p>
         </p:txBody>
       </p:sp>
@@ -13904,7 +13925,7 @@
                 <a:ea typeface="Inter" pitchFamily="34" charset="-122"/>
                 <a:cs typeface="Inter" pitchFamily="34" charset="-120"/>
               </a:rPr>
-              <a:t>Fewer shift times than today (15, not 18) — and most new ones are a small nudge.</a:t>
+              <a:t>Fewer shift times than today (16, not 18) — and most new ones are a small nudge.</a:t>
             </a:r>
             <a:endParaRPr lang="en-US" sz="1400" dirty="0"/>
           </a:p>

--- a/docs/proposals/presentations/Familiar-Nine-for-colleagues.pptx
+++ b/docs/proposals/presentations/Familiar-Nine-for-colleagues.pptx
@@ -780,7 +780,7 @@
           <a:p>
             <a:r>
               <a:rPr lang="en-US" dirty="0"/>
-              <a:t>The Office of Rail and Road publishes a list of rota patterns that tend to tire people. Today’s link shows five of them; Familiar Nine shows none. Two more — early starts and a weekly rotation — come with every weekly link at a 06:20 station, so they are listed on the sheet for information but not counted against any design.</a:t>
+              <a:t>The Office of Rail and Road and the rail industry publish lists of rota patterns that tend to tire people. Today’s link shows five of them; Familiar Nine shows none. Two more — early starts and a weekly rotation — come with every weekly link at a 06:20 station, so they are listed on the sheet for information but not counted against any design.</a:t>
             </a:r>
             <a:endParaRPr lang="en-US" dirty="0"/>
           </a:p>
@@ -4513,7 +4513,7 @@
                 <a:ea typeface="Inter" pitchFamily="34" charset="-122"/>
                 <a:cs typeface="Inter" pitchFamily="34" charset="-120"/>
               </a:rPr>
-              <a:t>Avoidable tiring patterns in the rota</a:t>
+              <a:t>Avoidable fatigue warnings in the rota</a:t>
             </a:r>
             <a:endParaRPr lang="en-US" sz="1400" dirty="0"/>
           </a:p>
@@ -4657,7 +4657,7 @@
                 <a:ea typeface="Inter" pitchFamily="34" charset="-122"/>
                 <a:cs typeface="Inter" pitchFamily="34" charset="-120"/>
               </a:rPr>
-              <a:t>Never fewer than three on the floor, and none of the avoidable tiring patterns.</a:t>
+              <a:t>Never fewer than three on the floor, and no avoidable fatigue warnings.</a:t>
             </a:r>
             <a:endParaRPr lang="en-US" sz="1400" dirty="0"/>
           </a:p>
@@ -7685,7 +7685,7 @@
                           <a:ea typeface="Inter" pitchFamily="34" charset="-122"/>
                           <a:cs typeface="Inter" pitchFamily="34" charset="-120"/>
                         </a:rPr>
-                        <a:t>Avoidable tiring patterns in the rota</a:t>
+                        <a:t>Avoidable fatigue warnings in the rota</a:t>
                       </a:r>
                       <a:endParaRPr lang="en-US" sz="1200" dirty="0">
                         <a:latin typeface="Inter" charset="0"/>
@@ -9659,7 +9659,7 @@
                 <a:ea typeface="Inter" pitchFamily="34" charset="-122"/>
                 <a:cs typeface="Inter" pitchFamily="34" charset="-120"/>
               </a:rPr>
-              <a:t>At least 14 on a Saturday and 10 on a Sunday, and more at the open and the close.</a:t>
+              <a:t>At least 10 on a Sunday, 14 on a Saturday where it can be, and more at the open and the close.</a:t>
             </a:r>
             <a:endParaRPr lang="en-US" sz="1300" dirty="0"/>
           </a:p>
@@ -14794,7 +14794,7 @@
                 <a:ea typeface="Inter" pitchFamily="34" charset="-122"/>
                 <a:cs typeface="Inter" pitchFamily="34" charset="-120"/>
               </a:rPr>
-              <a:t>Weeks on the same shift time Monday to Friday</a:t>
+              <a:t>Weeks all earlies or all lates, one shift time Mon–Fri</a:t>
             </a:r>
             <a:endParaRPr lang="en-US" sz="1400" dirty="0"/>
           </a:p>

--- a/docs/proposals/presentations/Familiar-Nine-for-colleagues.pptx
+++ b/docs/proposals/presentations/Familiar-Nine-for-colleagues.pptx
@@ -516,7 +516,7 @@
           <a:p>
             <a:r>
               <a:rPr lang="en-US" dirty="0"/>
-              <a:t>Thank the room. Say straight away this is a proposal, not a decision. The aim tonight is to answer the questions people actually ask about a new link: will I work more, will my shifts be longer, will I know the times, what happens to my weekends and my leave. Every number in these slides was worked out from the rota itself, not typed in by hand.</a:t>
+              <a:t>Thank the room. Say straight away this is a proposal, not a decision. The aim tonight is to answer the questions people actually ask about a new link: will I work more, will my shifts be longer, will I know the times, what happens to my weekends and my leave. Every number in these slides comes from the rota calculations and has been independently checked; the slides themselves present those results by hand.</a:t>
             </a:r>
             <a:endParaRPr lang="en-US" dirty="0"/>
           </a:p>
@@ -1220,7 +1220,7 @@
           <a:p>
             <a:r>
               <a:rPr lang="en-US" dirty="0"/>
-              <a:t>The change is coming whatever we do: the December 2026 timetable and the new staffing levels mean the link has to be redrawn. The question is which version we want. The new staffing levels, the 24 people and the Sunday cover are all confirmed.</a:t>
+              <a:t>The change is coming whatever we do: the December 2026 timetable and the new staffing levels mean the link has to be redrawn. The question is which version we want. The staffing levels, the 24 people and the Sunday cover are confirmed: nine rules the proposal is scored on. Fourteen on a Saturday is one of three flexible aims, worked towards but not scored.</a:t>
             </a:r>
             <a:endParaRPr lang="en-US" dirty="0"/>
           </a:p>
@@ -2919,7 +2919,7 @@
                 <a:ea typeface="Inter" pitchFamily="34" charset="-122"/>
                 <a:cs typeface="Inter" pitchFamily="34" charset="-120"/>
               </a:rPr>
-              <a:t>No shift in the balance of earlies and lates, and no change to how Sundays work.</a:t>
+              <a:t>No shift in the balance of earlies and lates. Sundays stay overtime and still finish at 23:25.</a:t>
             </a:r>
             <a:endParaRPr lang="en-US" sz="1400" dirty="0"/>
           </a:p>
@@ -9659,7 +9659,7 @@
                 <a:ea typeface="Inter" pitchFamily="34" charset="-122"/>
                 <a:cs typeface="Inter" pitchFamily="34" charset="-120"/>
               </a:rPr>
-              <a:t>At least 10 on a Sunday, 14 on a Saturday where it can be, and more at the open and the close.</a:t>
+              <a:t>At least 10 on a Sunday, and more at the open and the close. We also aim for 14 on a Saturday.</a:t>
             </a:r>
             <a:endParaRPr lang="en-US" sz="1300" dirty="0"/>
           </a:p>

--- a/docs/proposals/presentations/Familiar-Nine-for-colleagues.pptx
+++ b/docs/proposals/presentations/Familiar-Nine-for-colleagues.pptx
@@ -1484,7 +1484,7 @@
           <a:p>
             <a:r>
               <a:rPr lang="en-US" dirty="0"/>
-              <a:t>Lead with the closers: they are the shifts people dislike most, and every one of them is shorter. Weekday 15:45 to 23:55 instead of 15:15 (8h10, not 8h40); Saturday 15:15 instead of 14:45 (8h40, not 9h10); Sunday 15:15 to 23:25 instead of 14:30 (8h10, not 8h55). Be upfront about the six minutes on the average: that is what pays for working two fewer days a year. If asked: there is also a weekday 14:30–23:25, five a week — the same times as today’s Sunday closer, so it is not new, and it finishes half an hour before the close.</a:t>
+              <a:t>Lead with the closers: they are the shifts people dislike most, and every one of them is shorter. Weekday 15:45 to 23:55 instead of 15:15 (8h 10m, not 8h 40m); Saturday 15:15 instead of 14:45 (8h 40m, not 9h 10m); Sunday 15:15 to 23:25 instead of 14:30 (8h 10m, not 8h 55m). Be upfront about the six minutes on the average: that is what pays for working two fewer days a year. If asked: there is also a weekday 14:30–23:25, five a week — the same times as today’s Sunday closer, so it is not new, and it finishes half an hour before the close.</a:t>
             </a:r>
             <a:endParaRPr lang="en-US" dirty="0"/>
           </a:p>
@@ -1572,7 +1572,7 @@
           <a:p>
             <a:r>
               <a:rPr lang="en-US" dirty="0"/>
-              <a:t>Be straight about this one — it is the change people will notice most. December needs three on duty to the close and five still on at 22:00, where today has two and four, so more late finishes have to go somewhere. Spread over 24 people that is about 20 more a year each finishing at 23:00 or later. Early 06:20 starts hardly change. And because the shortest gap between two shifts is 14h20, nobody finishes late and starts early the next morning.</a:t>
+              <a:t>Be straight about this one — it is the change people will notice most. December needs three on duty to the close and five still on at 22:00, where today has two and four, so more late finishes have to go somewhere. Spread over 24 people that is about 20 more a year each finishing at 23:00 or later. Early 06:20 starts hardly change. And because the shortest gap between two shifts is 14h 20m, nobody finishes late and starts early the next morning.</a:t>
             </a:r>
             <a:endParaRPr lang="en-US" dirty="0"/>
           </a:p>
@@ -6311,7 +6311,7 @@
                           <a:ea typeface="Inter" pitchFamily="34" charset="-122"/>
                           <a:cs typeface="Inter" pitchFamily="34" charset="-120"/>
                         </a:rPr>
-                        <a:t>8h14 · 9h10</a:t>
+                        <a:t>8h 14m · 9h 10m</a:t>
                       </a:r>
                       <a:endParaRPr lang="en-US" sz="1200" dirty="0">
                         <a:latin typeface="Inter" charset="0"/>
@@ -6379,7 +6379,7 @@
                           <a:ea typeface="Inter" pitchFamily="34" charset="-122"/>
                           <a:cs typeface="Inter" pitchFamily="34" charset="-120"/>
                         </a:rPr>
-                        <a:t>8h20 · 9h00</a:t>
+                        <a:t>8h 20m · 9h 00m</a:t>
                       </a:r>
                       <a:endParaRPr lang="en-US" sz="1200" dirty="0">
                         <a:latin typeface="Inter" charset="0"/>
@@ -6517,7 +6517,7 @@
                           <a:ea typeface="Inter" pitchFamily="34" charset="-122"/>
                           <a:cs typeface="Inter" pitchFamily="34" charset="-120"/>
                         </a:rPr>
-                        <a:t>8h40 · 9h10 · 8h55</a:t>
+                        <a:t>8h 40m · 9h 10m · 8h 55m</a:t>
                       </a:r>
                       <a:endParaRPr lang="en-US" sz="1200" dirty="0">
                         <a:latin typeface="Inter" charset="0"/>
@@ -6585,7 +6585,7 @@
                           <a:ea typeface="Inter" pitchFamily="34" charset="-122"/>
                           <a:cs typeface="Inter" pitchFamily="34" charset="-120"/>
                         </a:rPr>
-                        <a:t>8h10 · 8h40 · 8h10</a:t>
+                        <a:t>8h 10m · 8h 40m · 8h 10m</a:t>
                       </a:r>
                       <a:endParaRPr lang="en-US" sz="1200" dirty="0">
                         <a:latin typeface="Inter" charset="0"/>
@@ -7135,7 +7135,7 @@
                           <a:ea typeface="Inter" pitchFamily="34" charset="-122"/>
                           <a:cs typeface="Inter" pitchFamily="34" charset="-120"/>
                         </a:rPr>
-                        <a:t>12h30</a:t>
+                        <a:t>12h 30m</a:t>
                       </a:r>
                       <a:endParaRPr lang="en-US" sz="1200" dirty="0">
                         <a:latin typeface="Inter" charset="0"/>
@@ -7203,7 +7203,7 @@
                           <a:ea typeface="Inter" pitchFamily="34" charset="-122"/>
                           <a:cs typeface="Inter" pitchFamily="34" charset="-120"/>
                         </a:rPr>
-                        <a:t>14h20</a:t>
+                        <a:t>14h 20m</a:t>
                       </a:r>
                       <a:endParaRPr lang="en-US" sz="1200" dirty="0">
                         <a:latin typeface="Inter" charset="0"/>
@@ -11568,7 +11568,7 @@
                 <a:ea typeface="Inter" pitchFamily="34" charset="-122"/>
                 <a:cs typeface="Inter" pitchFamily="34" charset="-120"/>
               </a:rPr>
-              <a:t>8h40</a:t>
+              <a:t>8h 40m</a:t>
             </a:r>
             <a:endParaRPr lang="en-US" sz="1600" dirty="0"/>
           </a:p>
@@ -11607,7 +11607,7 @@
                 <a:ea typeface="Inter" pitchFamily="34" charset="-122"/>
                 <a:cs typeface="Inter" pitchFamily="34" charset="-120"/>
               </a:rPr>
-              <a:t>8h10</a:t>
+              <a:t>8h 10m</a:t>
             </a:r>
             <a:endParaRPr lang="en-US" sz="1800" dirty="0"/>
           </a:p>
@@ -11712,7 +11712,7 @@
                 <a:ea typeface="Inter" pitchFamily="34" charset="-122"/>
                 <a:cs typeface="Inter" pitchFamily="34" charset="-120"/>
               </a:rPr>
-              <a:t>9h10</a:t>
+              <a:t>9h 10m</a:t>
             </a:r>
             <a:endParaRPr lang="en-US" sz="1600" dirty="0"/>
           </a:p>
@@ -11751,7 +11751,7 @@
                 <a:ea typeface="Inter" pitchFamily="34" charset="-122"/>
                 <a:cs typeface="Inter" pitchFamily="34" charset="-120"/>
               </a:rPr>
-              <a:t>8h40</a:t>
+              <a:t>8h 40m</a:t>
             </a:r>
             <a:endParaRPr lang="en-US" sz="1800" dirty="0"/>
           </a:p>
@@ -11856,7 +11856,7 @@
                 <a:ea typeface="Inter" pitchFamily="34" charset="-122"/>
                 <a:cs typeface="Inter" pitchFamily="34" charset="-120"/>
               </a:rPr>
-              <a:t>8h55</a:t>
+              <a:t>8h 55m</a:t>
             </a:r>
             <a:endParaRPr lang="en-US" sz="1600" dirty="0"/>
           </a:p>
@@ -11895,7 +11895,7 @@
                 <a:ea typeface="Inter" pitchFamily="34" charset="-122"/>
                 <a:cs typeface="Inter" pitchFamily="34" charset="-120"/>
               </a:rPr>
-              <a:t>8h10</a:t>
+              <a:t>8h 10m</a:t>
             </a:r>
             <a:endParaRPr lang="en-US" sz="1800" dirty="0"/>
           </a:p>
@@ -12000,7 +12000,7 @@
                 <a:ea typeface="Inter" pitchFamily="34" charset="-122"/>
                 <a:cs typeface="Inter" pitchFamily="34" charset="-120"/>
               </a:rPr>
-              <a:t>9h10</a:t>
+              <a:t>9h 10m</a:t>
             </a:r>
             <a:endParaRPr lang="en-US" sz="1600" dirty="0"/>
           </a:p>
@@ -12039,7 +12039,7 @@
                 <a:ea typeface="Inter" pitchFamily="34" charset="-122"/>
                 <a:cs typeface="Inter" pitchFamily="34" charset="-120"/>
               </a:rPr>
-              <a:t>9h00</a:t>
+              <a:t>9h 00m</a:t>
             </a:r>
             <a:endParaRPr lang="en-US" sz="1800" dirty="0"/>
           </a:p>
@@ -12144,7 +12144,7 @@
                 <a:ea typeface="Inter" pitchFamily="34" charset="-122"/>
                 <a:cs typeface="Inter" pitchFamily="34" charset="-120"/>
               </a:rPr>
-              <a:t>8h14</a:t>
+              <a:t>8h 14m</a:t>
             </a:r>
             <a:endParaRPr lang="en-US" sz="1600" dirty="0"/>
           </a:p>
@@ -12183,7 +12183,7 @@
                 <a:ea typeface="Inter" pitchFamily="34" charset="-122"/>
                 <a:cs typeface="Inter" pitchFamily="34" charset="-120"/>
               </a:rPr>
-              <a:t>8h20</a:t>
+              <a:t>8h 20m</a:t>
             </a:r>
             <a:endParaRPr lang="en-US" sz="1800" dirty="0"/>
           </a:p>
@@ -13013,7 +13013,7 @@
                 <a:ea typeface="Inter" pitchFamily="34" charset="-122"/>
                 <a:cs typeface="Inter" pitchFamily="34" charset="-120"/>
               </a:rPr>
-              <a:t>12h30</a:t>
+              <a:t>12h 30m</a:t>
             </a:r>
             <a:endParaRPr lang="en-US" sz="1600" dirty="0"/>
           </a:p>
@@ -13052,7 +13052,7 @@
                 <a:ea typeface="Inter" pitchFamily="34" charset="-122"/>
                 <a:cs typeface="Inter" pitchFamily="34" charset="-120"/>
               </a:rPr>
-              <a:t>14h20</a:t>
+              <a:t>14h 20m</a:t>
             </a:r>
             <a:endParaRPr lang="en-US" sz="1800" dirty="0"/>
           </a:p>
@@ -13409,7 +13409,7 @@
           <a:bodyPr wrap="square" lIns="0" tIns="0" rIns="0" bIns="0" rtlCol="0" anchor="t"/>
           <a:lstStyle/>
           <a:p>
-            <a:pPr marL="342900" indent="-342900">
+            <a:pPr marL="152400" indent="-152400">
               <a:spcAft>
                 <a:spcPts val="200"/>
               </a:spcAft>
@@ -13430,7 +13430,7 @@
             <a:endParaRPr lang="en-US" sz="1200" dirty="0"/>
           </a:p>
           <a:p>
-            <a:pPr marL="342900" indent="-342900">
+            <a:pPr marL="152400" indent="-152400">
               <a:spcAft>
                 <a:spcPts val="200"/>
               </a:spcAft>
@@ -13451,7 +13451,7 @@
             <a:endParaRPr lang="en-US" sz="1200" dirty="0"/>
           </a:p>
           <a:p>
-            <a:pPr marL="342900" indent="-342900">
+            <a:pPr marL="152400" indent="-152400">
               <a:spcAft>
                 <a:spcPts val="200"/>
               </a:spcAft>
@@ -13472,7 +13472,7 @@
             <a:endParaRPr lang="en-US" sz="1200" dirty="0"/>
           </a:p>
           <a:p>
-            <a:pPr marL="342900" indent="-342900">
+            <a:pPr marL="152400" indent="-152400">
               <a:spcAft>
                 <a:spcPts val="200"/>
               </a:spcAft>
@@ -13650,7 +13650,7 @@
             <a:endParaRPr lang="en-US" sz="1050" dirty="0"/>
           </a:p>
           <a:p>
-            <a:pPr marL="342900" indent="-342900">
+            <a:pPr marL="152400" indent="-152400">
               <a:spcAft>
                 <a:spcPts val="100"/>
               </a:spcAft>
@@ -13671,7 +13671,7 @@
             <a:endParaRPr lang="en-US" sz="1050" dirty="0"/>
           </a:p>
           <a:p>
-            <a:pPr marL="342900" indent="-342900">
+            <a:pPr marL="152400" indent="-152400">
               <a:spcAft>
                 <a:spcPts val="100"/>
               </a:spcAft>
@@ -13715,7 +13715,7 @@
             <a:endParaRPr lang="en-US" sz="1050" dirty="0"/>
           </a:p>
           <a:p>
-            <a:pPr marL="342900" indent="-342900">
+            <a:pPr marL="152400" indent="-152400">
               <a:spcAft>
                 <a:spcPts val="100"/>
               </a:spcAft>
@@ -13736,7 +13736,7 @@
             <a:endParaRPr lang="en-US" sz="1050" dirty="0"/>
           </a:p>
           <a:p>
-            <a:pPr marL="342900" indent="-342900">
+            <a:pPr marL="152400" indent="-152400">
               <a:spcAft>
                 <a:spcPts val="100"/>
               </a:spcAft>
@@ -13780,7 +13780,7 @@
             <a:endParaRPr lang="en-US" sz="1050" dirty="0"/>
           </a:p>
           <a:p>
-            <a:pPr marL="342900" indent="-342900">
+            <a:pPr marL="152400" indent="-152400">
               <a:spcAft>
                 <a:spcPts val="100"/>
               </a:spcAft>
@@ -13801,7 +13801,7 @@
             <a:endParaRPr lang="en-US" sz="1050" dirty="0"/>
           </a:p>
           <a:p>
-            <a:pPr marL="342900" indent="-342900">
+            <a:pPr marL="152400" indent="-152400">
               <a:spcAft>
                 <a:spcPts val="100"/>
               </a:spcAft>
@@ -13822,7 +13822,7 @@
             <a:endParaRPr lang="en-US" sz="1050" dirty="0"/>
           </a:p>
           <a:p>
-            <a:pPr marL="342900" indent="-342900">
+            <a:pPr marL="152400" indent="-152400">
               <a:spcAft>
                 <a:spcPts val="100"/>
               </a:spcAft>
@@ -13843,7 +13843,7 @@
             <a:endParaRPr lang="en-US" sz="1050" dirty="0"/>
           </a:p>
           <a:p>
-            <a:pPr marL="342900" indent="-342900">
+            <a:pPr marL="152400" indent="-152400">
               <a:spcAft>
                 <a:spcPts val="100"/>
               </a:spcAft>
@@ -14689,7 +14689,7 @@
                 <a:ea typeface="Inter" pitchFamily="34" charset="-122"/>
                 <a:cs typeface="Inter" pitchFamily="34" charset="-120"/>
               </a:rPr>
-              <a:t>12h30</a:t>
+              <a:t>12h 30m</a:t>
             </a:r>
             <a:endParaRPr lang="en-US" sz="1600" dirty="0"/>
           </a:p>
@@ -14728,7 +14728,7 @@
                 <a:ea typeface="Inter" pitchFamily="34" charset="-122"/>
                 <a:cs typeface="Inter" pitchFamily="34" charset="-120"/>
               </a:rPr>
-              <a:t>14h20</a:t>
+              <a:t>14h 20m</a:t>
             </a:r>
             <a:endParaRPr lang="en-US" sz="1800" dirty="0"/>
           </a:p>
@@ -14794,7 +14794,7 @@
                 <a:ea typeface="Inter" pitchFamily="34" charset="-122"/>
                 <a:cs typeface="Inter" pitchFamily="34" charset="-120"/>
               </a:rPr>
-              <a:t>Weeks all earlies or all lates, one shift time Mon–Fri</a:t>
+              <a:t>Weeks on one turn, Monday to Friday</a:t>
             </a:r>
             <a:endParaRPr lang="en-US" sz="1400" dirty="0"/>
           </a:p>

--- a/docs/proposals/presentations/Familiar-Nine-for-colleagues.pptx
+++ b/docs/proposals/presentations/Familiar-Nine-for-colleagues.pptx
@@ -1396,7 +1396,7 @@
           <a:p>
             <a:r>
               <a:rPr lang="en-US" dirty="0"/>
-              <a:t>Basic pay follows the 35-hour week, which is what this slide answers; overtime and premium duties vary person to person. The Saturday and Sunday counts are the link’s fixed duties and leave out anything later given in a cover week. Basic pay follows the 35-hour week, which does not change. Saturdays in the contract are paid at time and a quarter, and on average a person is rostered about 30 a year instead of 26. Sundays stay overtime: 10 a week shared among 24 people instead of 8 among 20, so about the same each. These are averages across the whole link — your own depends on which line you start on — and they are not a payslip; the Pay Calculator in the app does that.</a:t>
+              <a:t>Basic pay follows the 35-hour week, which does not change; overtime and premium duties vary person to person. The Saturday and Sunday counts are the link’s fixed duties and leave out anything later given in a cover week. Saturdays in the contract are paid at time and a quarter, and on average a person is rostered about 30 a year instead of 26. Sundays stay overtime: 10 a week shared among 24 people instead of 8 among 20, so about the same each. These are averages across the whole link — your own depends on which line you start on — and they are not a payslip; the Pay Calculator in the app does that.</a:t>
             </a:r>
             <a:endParaRPr lang="en-US" dirty="0"/>
           </a:p>
@@ -1572,7 +1572,7 @@
           <a:p>
             <a:r>
               <a:rPr lang="en-US" dirty="0"/>
-              <a:t>Be straight about this one — it is the change people will notice most. December needs three on duty to the close and five still on at 22:00, where today has two and four, so more late finishes have to go somewhere. Spread over 24 people that is about 20 more a year each finishing at 23:00 or later. Early 06:20 starts hardly change. And because the shortest gap between two shifts is 14h 20m, nobody finishes late and starts early the next morning.</a:t>
+              <a:t>Be straight about this one — it is the change people will notice most. December needs three on duty to the close and five still on at 22:00, where today’s weekdays have two and four, so more late finishes have to go somewhere. Spread over 24 people that is about 20 more a year each finishing at 23:00 or later. Early 06:20 starts hardly change. And because the shortest gap between two shifts is 14h 20m, nobody finishes late and starts early the next morning.</a:t>
             </a:r>
             <a:endParaRPr lang="en-US" dirty="0"/>
           </a:p>
@@ -11020,7 +11020,7 @@
             <a:r>
               <a:rPr lang="en-US" sz="1800" b="1" dirty="0">
                 <a:solidFill>
-                  <a:srgbClr val="1E7B4B"/>
+                  <a:srgbClr val="001E3C"/>
                 </a:solidFill>
                 <a:latin typeface="Inter" pitchFamily="34" charset="0"/>
                 <a:ea typeface="Inter" pitchFamily="34" charset="-122"/>
@@ -13838,7 +13838,7 @@
                 <a:ea typeface="Inter" pitchFamily="34" charset="-122"/>
                 <a:cs typeface="Inter" pitchFamily="34" charset="-120"/>
               </a:rPr>
-              <a:t>09:00–18:00 — a new mid-day shift</a:t>
+              <a:t>09:00–18:00 — a new early, 9 hours</a:t>
             </a:r>
             <a:endParaRPr lang="en-US" sz="1050" dirty="0"/>
           </a:p>

--- a/docs/proposals/presentations/Familiar-Nine-for-colleagues.pptx
+++ b/docs/proposals/presentations/Familiar-Nine-for-colleagues.pptx
@@ -5121,7 +5121,7 @@
                 <a:ea typeface="Inter" pitchFamily="34" charset="-122"/>
                 <a:cs typeface="Inter" pitchFamily="34" charset="-120"/>
               </a:rPr>
-              <a:t>On average and at worst, about the same as today.</a:t>
+              <a:t>Average and worst: about the same as today.</a:t>
             </a:r>
             <a:endParaRPr lang="en-US" sz="1250" dirty="0"/>
           </a:p>
@@ -5226,7 +5226,7 @@
                 <a:ea typeface="Inter" pitchFamily="34" charset="-122"/>
                 <a:cs typeface="Inter" pitchFamily="34" charset="-120"/>
               </a:rPr>
-              <a:t>Now evenly spaced — every sixth week (1, 7, 13, 19).</a:t>
+              <a:t>Evenly spaced — every sixth week (1, 7, 13, 19).</a:t>
             </a:r>
             <a:endParaRPr lang="en-US" sz="1250" dirty="0"/>
           </a:p>

--- a/docs/proposals/presentations/Familiar-Nine-for-colleagues.pptx
+++ b/docs/proposals/presentations/Familiar-Nine-for-colleagues.pptx
@@ -1396,7 +1396,7 @@
           <a:p>
             <a:r>
               <a:rPr lang="en-US" dirty="0"/>
-              <a:t>Basic pay follows the 35-hour week, which is what this slide answers; overtime and premium duties vary person to person. The Saturday and Sunday counts are the link’s fixed duties and leave out anything later given in a cover week. Basic pay follows the 35-hour week, which does not change. Saturdays in the contract are paid at time and a quarter, and on average a person is rostered about 30 a year instead of 26. Sundays stay overtime: 10 a week shared among 24 people instead of 8 among 20, so about the same each. These are averages across the whole link — your own depends on which line you start on — and they are not a payslip; the Pay Calculator in the app does that.</a:t>
+              <a:t>Basic pay follows the 35-hour week, which does not change; overtime and premium duties vary person to person. The Saturday and Sunday counts are the link’s fixed duties and leave out anything later given in a cover week. Saturdays in the contract are paid at time and a quarter, and on average a person is rostered about 30 a year instead of 26. Sundays stay overtime: 10 a week shared among 24 people instead of 8 among 20, so about the same each. These are averages across the whole link — your own depends on which line you start on — and they are not a payslip; the Pay Calculator in the app does that.</a:t>
             </a:r>
             <a:endParaRPr lang="en-US" dirty="0"/>
           </a:p>
@@ -1572,7 +1572,7 @@
           <a:p>
             <a:r>
               <a:rPr lang="en-US" dirty="0"/>
-              <a:t>Be straight about this one — it is the change people will notice most. December needs three on duty to the close and five still on at 22:00, where today has two and four, so more late finishes have to go somewhere. Spread over 24 people that is about 20 more a year each finishing at 23:00 or later. Early 06:20 starts hardly change. And because the shortest gap between two shifts is 14h 20m, nobody finishes late and starts early the next morning.</a:t>
+              <a:t>Be straight about this one — it is the change people will notice most. December needs three on duty to the close and five still on at 22:00, where today’s weekdays have two and four, so more late finishes have to go somewhere. Spread over 24 people that is about 20 more a year each finishing at 23:00 or later. Early 06:20 starts hardly change. And because the shortest gap between two shifts is 14h 20m, nobody finishes late and starts early the next morning.</a:t>
             </a:r>
             <a:endParaRPr lang="en-US" dirty="0"/>
           </a:p>
@@ -5121,7 +5121,7 @@
                 <a:ea typeface="Inter" pitchFamily="34" charset="-122"/>
                 <a:cs typeface="Inter" pitchFamily="34" charset="-120"/>
               </a:rPr>
-              <a:t>On average and at worst, about the same as today.</a:t>
+              <a:t>Average and worst: about the same as today.</a:t>
             </a:r>
             <a:endParaRPr lang="en-US" sz="1250" dirty="0"/>
           </a:p>
@@ -5226,7 +5226,7 @@
                 <a:ea typeface="Inter" pitchFamily="34" charset="-122"/>
                 <a:cs typeface="Inter" pitchFamily="34" charset="-120"/>
               </a:rPr>
-              <a:t>Now evenly spaced — every sixth week (1, 7, 13, 19).</a:t>
+              <a:t>Evenly spaced — every sixth week (1, 7, 13, 19).</a:t>
             </a:r>
             <a:endParaRPr lang="en-US" sz="1250" dirty="0"/>
           </a:p>
@@ -11020,7 +11020,7 @@
             <a:r>
               <a:rPr lang="en-US" sz="1800" b="1" dirty="0">
                 <a:solidFill>
-                  <a:srgbClr val="1E7B4B"/>
+                  <a:srgbClr val="001E3C"/>
                 </a:solidFill>
                 <a:latin typeface="Inter" pitchFamily="34" charset="0"/>
                 <a:ea typeface="Inter" pitchFamily="34" charset="-122"/>
@@ -13838,7 +13838,7 @@
                 <a:ea typeface="Inter" pitchFamily="34" charset="-122"/>
                 <a:cs typeface="Inter" pitchFamily="34" charset="-120"/>
               </a:rPr>
-              <a:t>09:00–18:00 — a new mid-day shift</a:t>
+              <a:t>09:00–18:00 — a new early, 9 hours</a:t>
             </a:r>
             <a:endParaRPr lang="en-US" sz="1050" dirty="0"/>
           </a:p>

--- a/docs/proposals/presentations/Familiar-Nine-for-colleagues.pptx
+++ b/docs/proposals/presentations/Familiar-Nine-for-colleagues.pptx
@@ -4513,7 +4513,7 @@
                 <a:ea typeface="Inter" pitchFamily="34" charset="-122"/>
                 <a:cs typeface="Inter" pitchFamily="34" charset="-120"/>
               </a:rPr>
-              <a:t>Avoidable fatigue warnings in the rota</a:t>
+              <a:t>Avoidable fatigue warnings in the fixed rota</a:t>
             </a:r>
             <a:endParaRPr lang="en-US" sz="1400" dirty="0"/>
           </a:p>
@@ -4657,7 +4657,7 @@
                 <a:ea typeface="Inter" pitchFamily="34" charset="-122"/>
                 <a:cs typeface="Inter" pitchFamily="34" charset="-120"/>
               </a:rPr>
-              <a:t>Never fewer than three on the floor, and no avoidable fatigue warnings.</a:t>
+              <a:t>Never fewer than three on the floor, and no avoidable fatigue warnings in the fixed rota.</a:t>
             </a:r>
             <a:endParaRPr lang="en-US" sz="1400" dirty="0"/>
           </a:p>
@@ -5016,7 +5016,7 @@
                 <a:ea typeface="Inter" pitchFamily="34" charset="-122"/>
                 <a:cs typeface="Inter" pitchFamily="34" charset="-120"/>
               </a:rPr>
-              <a:t>That is what buys the two fewer days a year.</a:t>
+              <a:t>That is what buys two fewer contracted days.</a:t>
             </a:r>
             <a:endParaRPr lang="en-US" sz="1250" dirty="0"/>
           </a:p>
@@ -7685,7 +7685,7 @@
                           <a:ea typeface="Inter" pitchFamily="34" charset="-122"/>
                           <a:cs typeface="Inter" pitchFamily="34" charset="-120"/>
                         </a:rPr>
-                        <a:t>Avoidable fatigue warnings in the rota</a:t>
+                        <a:t>Avoidable fatigue warnings in the fixed rota</a:t>
                       </a:r>
                       <a:endParaRPr lang="en-US" sz="1200" dirty="0">
                         <a:latin typeface="Inter" charset="0"/>
@@ -7937,7 +7937,7 @@
                 <a:ea typeface="Inter" pitchFamily="34" charset="-122"/>
                 <a:cs typeface="Inter" pitchFamily="34" charset="-120"/>
               </a:rPr>
-              <a:t>Same hours, fewer days, shorter closers, more weekends — and more colleagues on shift.</a:t>
+              <a:t>Same hours, fewer contracted days, shorter closers, more weekends, more colleagues.</a:t>
             </a:r>
             <a:endParaRPr lang="en-US" sz="1400" dirty="0"/>
           </a:p>
@@ -9129,7 +9129,7 @@
                 <a:ea typeface="Inter" pitchFamily="34" charset="-122"/>
                 <a:cs typeface="Inter" pitchFamily="34" charset="-120"/>
               </a:rPr>
-              <a:t>Same hours, shorter closing shifts, more weekends — and mostly times you already know.</a:t>
+              <a:t>Same hours, shorter closing shifts, more weekends — and half the times already familiar.</a:t>
             </a:r>
             <a:endParaRPr lang="en-US" sz="1400" dirty="0"/>
           </a:p>
@@ -10511,7 +10511,7 @@
                 <a:ea typeface="Inter" pitchFamily="34" charset="-122"/>
                 <a:cs typeface="Inter" pitchFamily="34" charset="-120"/>
               </a:rPr>
-              <a:t>No. Exactly the same 35-hour week — and about 2 fewer days at work a year.</a:t>
+              <a:t>No. Exactly the same 35-hour week — and about 2 fewer contracted days a year.</a:t>
             </a:r>
             <a:endParaRPr lang="en-US" sz="1400" dirty="0"/>
           </a:p>
@@ -11250,6 +11250,45 @@
         </p:nvSpPr>
         <p:spPr>
           <a:xfrm>
+            <a:off x="4023360" y="4754880"/>
+            <a:ext cx="4663440" cy="310896"/>
+          </a:xfrm>
+          <a:prstGeom prst="rect">
+            <a:avLst/>
+          </a:prstGeom>
+          <a:noFill/>
+          <a:ln/>
+        </p:spPr>
+        <p:txBody>
+          <a:bodyPr wrap="square" lIns="0" tIns="0" rIns="0" bIns="0" rtlCol="0" anchor="t"/>
+          <a:lstStyle/>
+          <a:p>
+            <a:pPr algn="r" indent="0" marL="0">
+              <a:buNone/>
+            </a:pPr>
+            <a:r>
+              <a:rPr lang="en-US" sz="850" i="1" dirty="0">
+                <a:solidFill>
+                  <a:srgbClr val="5B6778"/>
+                </a:solidFill>
+                <a:latin typeface="Inter" pitchFamily="34" charset="0"/>
+                <a:ea typeface="Inter" pitchFamily="34" charset="-122"/>
+                <a:cs typeface="Inter" pitchFamily="34" charset="-120"/>
+              </a:rPr>
+              <a:t>Yearly figures are averages from the fixed rota; cover-week duties are not included.</a:t>
+            </a:r>
+            <a:endParaRPr lang="en-US" sz="850" dirty="0"/>
+          </a:p>
+        </p:txBody>
+      </p:sp>
+      <p:sp>
+        <p:nvSpPr>
+          <p:cNvPr id="21" name="Text 19"/>
+          <p:cNvSpPr txBox="1"/>
+          <p:nvPr/>
+        </p:nvSpPr>
+        <p:spPr>
+          <a:xfrm>
             <a:off x="457200" y="4800600"/>
             <a:ext cx="8229600" cy="228600"/>
           </a:xfrm>
@@ -13127,6 +13166,45 @@
       <p:sp>
         <p:nvSpPr>
           <p:cNvPr id="24" name="Text 22"/>
+          <p:cNvSpPr txBox="1"/>
+          <p:nvPr/>
+        </p:nvSpPr>
+        <p:spPr>
+          <a:xfrm>
+            <a:off x="4023360" y="4754880"/>
+            <a:ext cx="4663440" cy="310896"/>
+          </a:xfrm>
+          <a:prstGeom prst="rect">
+            <a:avLst/>
+          </a:prstGeom>
+          <a:noFill/>
+          <a:ln/>
+        </p:spPr>
+        <p:txBody>
+          <a:bodyPr wrap="square" lIns="0" tIns="0" rIns="0" bIns="0" rtlCol="0" anchor="t"/>
+          <a:lstStyle/>
+          <a:p>
+            <a:pPr algn="r" indent="0" marL="0">
+              <a:buNone/>
+            </a:pPr>
+            <a:r>
+              <a:rPr lang="en-US" sz="850" i="1" dirty="0">
+                <a:solidFill>
+                  <a:srgbClr val="5B6778"/>
+                </a:solidFill>
+                <a:latin typeface="Inter" pitchFamily="34" charset="0"/>
+                <a:ea typeface="Inter" pitchFamily="34" charset="-122"/>
+                <a:cs typeface="Inter" pitchFamily="34" charset="-120"/>
+              </a:rPr>
+              <a:t>Yearly figures are averages from the fixed rota; cover-week duties are not included.</a:t>
+            </a:r>
+            <a:endParaRPr lang="en-US" sz="850" dirty="0"/>
+          </a:p>
+        </p:txBody>
+      </p:sp>
+      <p:sp>
+        <p:nvSpPr>
+          <p:cNvPr id="25" name="Text 23"/>
           <p:cNvSpPr txBox="1"/>
           <p:nvPr/>
         </p:nvSpPr>

--- a/docs/proposals/presentations/Familiar-Nine-for-colleagues.pptx
+++ b/docs/proposals/presentations/Familiar-Nine-for-colleagues.pptx
@@ -4552,7 +4552,7 @@
                 <a:ea typeface="Inter" pitchFamily="34" charset="-122"/>
                 <a:cs typeface="Inter" pitchFamily="34" charset="-120"/>
               </a:rPr>
-              <a:t>5</a:t>
+              <a:t>4 (up to 5)</a:t>
             </a:r>
             <a:endParaRPr lang="en-US" sz="1600" dirty="0"/>
           </a:p>
@@ -6929,7 +6929,7 @@
                           <a:ea typeface="Inter" pitchFamily="34" charset="-122"/>
                           <a:cs typeface="Inter" pitchFamily="34" charset="-120"/>
                         </a:rPr>
-                        <a:t>9</a:t>
+                        <a:t>7 (up to 9)</a:t>
                       </a:r>
                       <a:endParaRPr lang="en-US" sz="1200" dirty="0">
                         <a:latin typeface="Inter" charset="0"/>
@@ -7753,7 +7753,7 @@
                           <a:ea typeface="Inter" pitchFamily="34" charset="-122"/>
                           <a:cs typeface="Inter" pitchFamily="34" charset="-120"/>
                         </a:rPr>
-                        <a:t>5</a:t>
+                        <a:t>4 (up to 5)</a:t>
                       </a:r>
                       <a:endParaRPr lang="en-US" sz="1200" dirty="0">
                         <a:latin typeface="Inter" charset="0"/>
@@ -8625,7 +8625,7 @@
                 <a:ea typeface="Inter" pitchFamily="34" charset="-122"/>
                 <a:cs typeface="Inter" pitchFamily="34" charset="-120"/>
               </a:rPr>
-              <a:t>today it can be 9</a:t>
+              <a:t>today 7, up to 9</a:t>
             </a:r>
             <a:endParaRPr lang="en-US" sz="1200" dirty="0"/>
           </a:p>
@@ -14479,7 +14479,7 @@
                 <a:ea typeface="Inter" pitchFamily="34" charset="-122"/>
                 <a:cs typeface="Inter" pitchFamily="34" charset="-120"/>
               </a:rPr>
-              <a:t>9</a:t>
+              <a:t>7 (up to 9)</a:t>
             </a:r>
             <a:endParaRPr lang="en-US" sz="1600" dirty="0"/>
           </a:p>

--- a/docs/proposals/presentations/Familiar-Nine-for-colleagues.pptx
+++ b/docs/proposals/presentations/Familiar-Nine-for-colleagues.pptx
@@ -4369,7 +4369,7 @@
                 <a:ea typeface="Inter" pitchFamily="34" charset="-122"/>
                 <a:cs typeface="Inter" pitchFamily="34" charset="-120"/>
               </a:rPr>
-              <a:t>Fewest ever on the station floor</a:t>
+              <a:t>Fewest rostered on the floor</a:t>
             </a:r>
             <a:endParaRPr lang="en-US" sz="1400" dirty="0"/>
           </a:p>
@@ -4657,7 +4657,7 @@
                 <a:ea typeface="Inter" pitchFamily="34" charset="-122"/>
                 <a:cs typeface="Inter" pitchFamily="34" charset="-120"/>
               </a:rPr>
-              <a:t>Never fewer than three on the floor, and no avoidable fatigue warnings in the fixed rota.</a:t>
+              <a:t>At least three rostered on the floor, and no avoidable fatigue warnings in the fixed rota.</a:t>
             </a:r>
             <a:endParaRPr lang="en-US" sz="1400" dirty="0"/>
           </a:p>
@@ -5331,7 +5331,7 @@
                 <a:ea typeface="Inter" pitchFamily="34" charset="-122"/>
                 <a:cs typeface="Inter" pitchFamily="34" charset="-120"/>
               </a:rPr>
-              <a:t>About 59 a year each at 23:00 or later, against 39 today.</a:t>
+              <a:t>About 59 a year each at 23:00 or later on the fixed rota, against 39 today.</a:t>
             </a:r>
             <a:endParaRPr lang="en-US" sz="1250" dirty="0"/>
           </a:p>
@@ -8479,7 +8479,7 @@
                 <a:ea typeface="Inter" pitchFamily="34" charset="-122"/>
                 <a:cs typeface="Inter" pitchFamily="34" charset="-120"/>
               </a:rPr>
-              <a:t>no extra hours</a:t>
+              <a:t>no extra contracted hours</a:t>
             </a:r>
             <a:endParaRPr lang="en-US" sz="1200" dirty="0"/>
           </a:p>

--- a/docs/proposals/presentations/Familiar-Nine-for-colleagues.pptx
+++ b/docs/proposals/presentations/Familiar-Nine-for-colleagues.pptx
@@ -692,7 +692,7 @@
           <a:p>
             <a:r>
               <a:rPr lang="en-US" dirty="0"/>
-              <a:t>Leave is only needed on working days Monday to Saturday; rest days and Sundays cost nothing. Today there is one unusual stretch of the roster where 14 days buys 30 days off — Familiar Nine spreads rest days more evenly, so its best is 28. On average it is about the same, and at its worst it is never worse than today. Four full weeks off (Sunday to Saturday) takes 15 days of leave instead of 14. The exact averages depend on where you count a booking as starting, so quote them as “about the same”.</a:t>
+              <a:t>Leave is only needed on working days Monday to Saturday; rest days and Sundays cost nothing. Today there is one unusual stretch of the roster where 14 days buys 30 days off — Familiar Nine spreads rest days more evenly, so its best is 28. On average it is about the same, and at its worst it is never worse than today. Four full weeks off (Sunday to Saturday) takes at least 15 days of leave, instead of 14 at best today. The exact averages depend on where you count a booking as starting, so quote them as “about the same”.</a:t>
             </a:r>
             <a:endParaRPr lang="en-US" dirty="0"/>
           </a:p>
@@ -780,7 +780,7 @@
           <a:p>
             <a:r>
               <a:rPr lang="en-US" dirty="0"/>
-              <a:t>The Office of Rail and Road and the rail industry publish lists of rota patterns that tend to tire people. Today’s link shows five of them; Familiar Nine shows none. Two more — early starts and a weekly rotation — come with every weekly link at a 06:20 station, so they are listed on the sheet for information but not counted against any design.</a:t>
+              <a:t>The Office of Rail and Road and the rail industry publish lists of rota patterns that tend to tire people. Today’s link shows four of them in the fixed rota (up to five where a cover week falls badly); Familiar Nine shows none. Two more — early starts and a weekly rotation — come with every weekly link at a 06:20 station, so they are listed on the sheet for information but not counted against any design.</a:t>
             </a:r>
             <a:endParaRPr lang="en-US" dirty="0"/>
           </a:p>
@@ -1132,7 +1132,7 @@
           <a:p>
             <a:r>
               <a:rPr lang="en-US" dirty="0"/>
-              <a:t>This is the whole pitch on one slide. Same 35-hour week as now. Never more than six days in a row. One full weekend off in every four weeks, against one in five today. Eight of the sixteen shift times are ones people already work. And every closing shift is shorter: the weekday and Saturday closers by 30 minutes, the Sunday closer by 45.</a:t>
+              <a:t>This is the whole pitch on one slide. Same 35-hour week as now. Never more than six days in a row. One full weekend off in every four weeks, against one in five today — though each person works about four more Saturdays a year. Eight of the sixteen shift times are ones people already work. And every closing shift is shorter: the weekday and Saturday closers by 30 minutes, the Sunday closer by 45.</a:t>
             </a:r>
             <a:endParaRPr lang="en-US" dirty="0"/>
           </a:p>
@@ -1220,7 +1220,7 @@
           <a:p>
             <a:r>
               <a:rPr lang="en-US" dirty="0"/>
-              <a:t>The change is coming whatever we do: the December 2026 timetable and the new staffing levels mean the link has to be redrawn. The question is which version we want. The staffing levels, the 24 people and the Sunday cover are confirmed: nine rules the proposal is scored on. Fourteen on a Saturday is one of three flexible aims, worked towards but not scored.</a:t>
+              <a:t>The change is coming whatever we do: the December 2026 timetable and the new staffing levels mean the link has to be redrawn. The question is which version we want. The staffing levels, the 24 people and the Sunday cover were confirmed verbally on 29 September 2026: nine rules the proposal is scored on. Fourteen on a Saturday is one of three flexible aims, worked towards but not scored.</a:t>
             </a:r>
             <a:endParaRPr lang="en-US" dirty="0"/>
           </a:p>
@@ -1572,7 +1572,7 @@
           <a:p>
             <a:r>
               <a:rPr lang="en-US" dirty="0"/>
-              <a:t>Be straight about this one — it is the change people will notice most. December needs three on duty to the close and five still on at 22:00, where today’s weekdays have two and four, so more late finishes have to go somewhere. Spread over 24 people that is about 20 more a year each finishing at 23:00 or later. Early 06:20 starts hardly change. And because the shortest gap between two shifts is 14h 20m, nobody finishes late and starts early the next morning.</a:t>
+              <a:t>Be straight about this one — it is the change people will notice most. About 20 more a year each finish at 23:00 or later. Only part of that is the December rules: three on duty to the close every day, where today’s weekdays have two, adds about six or seven a year each once it is spread over 24 people. The rest comes from how this design places its late shifts, not from the rules, so it is a fair question to ask. Early 06:20 starts hardly change. And because the shortest gap between two shifts is 14h 20m, nobody finishes late and starts early the next morning.</a:t>
             </a:r>
             <a:endParaRPr lang="en-US" dirty="0"/>
           </a:p>
@@ -2853,7 +2853,7 @@
                 <a:ea typeface="Inter" pitchFamily="34" charset="-122"/>
                 <a:cs typeface="Inter" pitchFamily="34" charset="-120"/>
               </a:rPr>
-              <a:t>The Sunday finish stays where it is. That is agreed practice and will remain so.</a:t>
+              <a:t>The Sunday finish stays where it is. That is agreed practice (settled 28 Sep 2026).</a:t>
             </a:r>
             <a:endParaRPr lang="en-US" sz="1300" dirty="0"/>
           </a:p>
@@ -3644,7 +3644,7 @@
                 <a:ea typeface="Inter" pitchFamily="34" charset="-122"/>
                 <a:cs typeface="Inter" pitchFamily="34" charset="-120"/>
               </a:rPr>
-              <a:t>Leave needed for four full weeks off</a:t>
+              <a:t>Leave needed for four full weeks off, at best</a:t>
             </a:r>
             <a:endParaRPr lang="en-US" sz="1400" dirty="0"/>
           </a:p>
@@ -3788,7 +3788,7 @@
                 <a:ea typeface="Inter" pitchFamily="34" charset="-122"/>
                 <a:cs typeface="Inter" pitchFamily="34" charset="-120"/>
               </a:rPr>
-              <a:t>About the same. A cover week still counts as 4 days of leave, exactly as now.</a:t>
+              <a:t>About the same. A cover week still counts as at most 4 days of leave, as now.</a:t>
             </a:r>
             <a:endParaRPr lang="en-US" sz="1400" dirty="0"/>
           </a:p>
@@ -3937,7 +3937,7 @@
                 <a:ea typeface="Inter" pitchFamily="34" charset="-122"/>
                 <a:cs typeface="Inter" pitchFamily="34" charset="-120"/>
               </a:rPr>
-              <a:t>More people on duty with you, all day</a:t>
+              <a:t>More people rostered every day, at the open and the close</a:t>
             </a:r>
             <a:endParaRPr lang="en-US" sz="1500" dirty="0"/>
           </a:p>
@@ -7937,7 +7937,7 @@
                 <a:ea typeface="Inter" pitchFamily="34" charset="-122"/>
                 <a:cs typeface="Inter" pitchFamily="34" charset="-120"/>
               </a:rPr>
-              <a:t>Same hours, fewer contracted days, shorter closers, more weekends, more colleagues.</a:t>
+              <a:t>Same hours, fewer contracted days, shorter closers, more full weekends off, more colleagues.</a:t>
             </a:r>
             <a:endParaRPr lang="en-US" sz="1400" dirty="0"/>
           </a:p>
@@ -9129,7 +9129,7 @@
                 <a:ea typeface="Inter" pitchFamily="34" charset="-122"/>
                 <a:cs typeface="Inter" pitchFamily="34" charset="-120"/>
               </a:rPr>
-              <a:t>Same hours, shorter closing shifts, more weekends — and half the times already familiar.</a:t>
+              <a:t>Same hours, shorter closing shifts, more full weekends off — and half the times already familiar.</a:t>
             </a:r>
             <a:endParaRPr lang="en-US" sz="1400" dirty="0"/>
           </a:p>
@@ -13157,7 +13157,7 @@
                 <a:ea typeface="Inter" pitchFamily="34" charset="-122"/>
                 <a:cs typeface="Inter" pitchFamily="34" charset="-120"/>
               </a:rPr>
-              <a:t>December needs more people at the close — but every closing shift is shorter.</a:t>
+              <a:t>More late finishes, only partly from the December rules — but every closing shift is shorter.</a:t>
             </a:r>
             <a:endParaRPr lang="en-US" sz="1400" dirty="0"/>
           </a:p>

--- a/docs/proposals/presentations/Familiar-Nine-for-colleagues.pptx
+++ b/docs/proposals/presentations/Familiar-Nine-for-colleagues.pptx
@@ -3644,7 +3644,7 @@
                 <a:ea typeface="Inter" pitchFamily="34" charset="-122"/>
                 <a:cs typeface="Inter" pitchFamily="34" charset="-120"/>
               </a:rPr>
-              <a:t>Leave needed for four full weeks off, at best</a:t>
+              <a:t>Leave for four full weeks off, at best</a:t>
             </a:r>
             <a:endParaRPr lang="en-US" sz="1400" dirty="0"/>
           </a:p>
@@ -4821,7 +4821,7 @@
         <p:spPr>
           <a:xfrm>
             <a:off x="457200" y="1371600"/>
-            <a:ext cx="4023360" cy="804672"/>
+            <a:ext cx="4023360" cy="975272"/>
           </a:xfrm>
           <a:prstGeom prst="roundRect">
             <a:avLst>
@@ -4847,7 +4847,7 @@
         </p:nvSpPr>
         <p:spPr>
           <a:xfrm>
-            <a:off x="640080" y="1444752"/>
+            <a:off x="640080" y="1530052"/>
             <a:ext cx="3703320" cy="310896"/>
           </a:xfrm>
           <a:prstGeom prst="rect">
@@ -4886,7 +4886,7 @@
         </p:nvSpPr>
         <p:spPr>
           <a:xfrm>
-            <a:off x="640080" y="1755648"/>
+            <a:off x="640080" y="1840948"/>
             <a:ext cx="3657600" cy="347472"/>
           </a:xfrm>
           <a:prstGeom prst="rect">
@@ -4896,7 +4896,7 @@
           <a:ln/>
         </p:spPr>
         <p:txBody>
-          <a:bodyPr wrap="square" lIns="0" tIns="0" rIns="0" bIns="0" rtlCol="0" anchor="ctr"/>
+          <a:bodyPr anchor="t" wrap="square" lIns="0" tIns="0" rIns="0" bIns="0" rtlCol="0"/>
           <a:lstStyle/>
           <a:p>
             <a:pPr indent="0" marL="0">
@@ -4926,7 +4926,7 @@
         <p:spPr>
           <a:xfrm>
             <a:off x="4663440" y="1371600"/>
-            <a:ext cx="4023360" cy="804672"/>
+            <a:ext cx="4023360" cy="975272"/>
           </a:xfrm>
           <a:prstGeom prst="roundRect">
             <a:avLst>
@@ -4952,7 +4952,7 @@
         </p:nvSpPr>
         <p:spPr>
           <a:xfrm>
-            <a:off x="4846320" y="1444752"/>
+            <a:off x="4846320" y="1530052"/>
             <a:ext cx="3703320" cy="310896"/>
           </a:xfrm>
           <a:prstGeom prst="rect">
@@ -4991,7 +4991,7 @@
         </p:nvSpPr>
         <p:spPr>
           <a:xfrm>
-            <a:off x="4846320" y="1755648"/>
+            <a:off x="4846320" y="1840948"/>
             <a:ext cx="3657600" cy="347472"/>
           </a:xfrm>
           <a:prstGeom prst="rect">
@@ -5001,7 +5001,7 @@
           <a:ln/>
         </p:spPr>
         <p:txBody>
-          <a:bodyPr wrap="square" lIns="0" tIns="0" rIns="0" bIns="0" rtlCol="0" anchor="ctr"/>
+          <a:bodyPr anchor="t" wrap="square" lIns="0" tIns="0" rIns="0" bIns="0" rtlCol="0"/>
           <a:lstStyle/>
           <a:p>
             <a:pPr indent="0" marL="0">
@@ -5030,8 +5030,8 @@
         </p:nvSpPr>
         <p:spPr>
           <a:xfrm>
-            <a:off x="457200" y="2286000"/>
-            <a:ext cx="4023360" cy="804672"/>
+            <a:off x="457200" y="2456600"/>
+            <a:ext cx="4023360" cy="975272"/>
           </a:xfrm>
           <a:prstGeom prst="roundRect">
             <a:avLst>
@@ -5057,7 +5057,7 @@
         </p:nvSpPr>
         <p:spPr>
           <a:xfrm>
-            <a:off x="640080" y="2359152"/>
+            <a:off x="640080" y="2615052"/>
             <a:ext cx="3703320" cy="310896"/>
           </a:xfrm>
           <a:prstGeom prst="rect">
@@ -5096,7 +5096,7 @@
         </p:nvSpPr>
         <p:spPr>
           <a:xfrm>
-            <a:off x="640080" y="2670048"/>
+            <a:off x="640080" y="2925948"/>
             <a:ext cx="3657600" cy="347472"/>
           </a:xfrm>
           <a:prstGeom prst="rect">
@@ -5106,7 +5106,7 @@
           <a:ln/>
         </p:spPr>
         <p:txBody>
-          <a:bodyPr wrap="square" lIns="0" tIns="0" rIns="0" bIns="0" rtlCol="0" anchor="ctr"/>
+          <a:bodyPr anchor="t" wrap="square" lIns="0" tIns="0" rIns="0" bIns="0" rtlCol="0"/>
           <a:lstStyle/>
           <a:p>
             <a:pPr indent="0" marL="0">
@@ -5135,8 +5135,8 @@
         </p:nvSpPr>
         <p:spPr>
           <a:xfrm>
-            <a:off x="4663440" y="2286000"/>
-            <a:ext cx="4023360" cy="804672"/>
+            <a:off x="4663440" y="2456600"/>
+            <a:ext cx="4023360" cy="975272"/>
           </a:xfrm>
           <a:prstGeom prst="roundRect">
             <a:avLst>
@@ -5162,7 +5162,7 @@
         </p:nvSpPr>
         <p:spPr>
           <a:xfrm>
-            <a:off x="4846320" y="2359152"/>
+            <a:off x="4846320" y="2615052"/>
             <a:ext cx="3703320" cy="310896"/>
           </a:xfrm>
           <a:prstGeom prst="rect">
@@ -5201,7 +5201,7 @@
         </p:nvSpPr>
         <p:spPr>
           <a:xfrm>
-            <a:off x="4846320" y="2670048"/>
+            <a:off x="4846320" y="2925948"/>
             <a:ext cx="3657600" cy="347472"/>
           </a:xfrm>
           <a:prstGeom prst="rect">
@@ -5211,7 +5211,7 @@
           <a:ln/>
         </p:spPr>
         <p:txBody>
-          <a:bodyPr wrap="square" lIns="0" tIns="0" rIns="0" bIns="0" rtlCol="0" anchor="ctr"/>
+          <a:bodyPr anchor="t" wrap="square" lIns="0" tIns="0" rIns="0" bIns="0" rtlCol="0"/>
           <a:lstStyle/>
           <a:p>
             <a:pPr indent="0" marL="0">
@@ -5240,8 +5240,8 @@
         </p:nvSpPr>
         <p:spPr>
           <a:xfrm>
-            <a:off x="457200" y="3200400"/>
-            <a:ext cx="4023360" cy="804672"/>
+            <a:off x="457200" y="3541600"/>
+            <a:ext cx="4023360" cy="975272"/>
           </a:xfrm>
           <a:prstGeom prst="roundRect">
             <a:avLst>
@@ -5267,7 +5267,7 @@
         </p:nvSpPr>
         <p:spPr>
           <a:xfrm>
-            <a:off x="640080" y="3273552"/>
+            <a:off x="640080" y="3700052"/>
             <a:ext cx="3703320" cy="310896"/>
           </a:xfrm>
           <a:prstGeom prst="rect">
@@ -5306,7 +5306,7 @@
         </p:nvSpPr>
         <p:spPr>
           <a:xfrm>
-            <a:off x="640080" y="3584448"/>
+            <a:off x="640080" y="4010948"/>
             <a:ext cx="3657600" cy="347472"/>
           </a:xfrm>
           <a:prstGeom prst="rect">
@@ -5316,7 +5316,7 @@
           <a:ln/>
         </p:spPr>
         <p:txBody>
-          <a:bodyPr wrap="square" lIns="0" tIns="0" rIns="0" bIns="0" rtlCol="0" anchor="ctr"/>
+          <a:bodyPr anchor="t" wrap="square" lIns="0" tIns="0" rIns="0" bIns="0" rtlCol="0"/>
           <a:lstStyle/>
           <a:p>
             <a:pPr indent="0" marL="0">
@@ -5345,8 +5345,8 @@
         </p:nvSpPr>
         <p:spPr>
           <a:xfrm>
-            <a:off x="4663440" y="3200400"/>
-            <a:ext cx="4023360" cy="804672"/>
+            <a:off x="4663440" y="3541600"/>
+            <a:ext cx="4023360" cy="975272"/>
           </a:xfrm>
           <a:prstGeom prst="roundRect">
             <a:avLst>
@@ -5372,7 +5372,7 @@
         </p:nvSpPr>
         <p:spPr>
           <a:xfrm>
-            <a:off x="4846320" y="3273552"/>
+            <a:off x="4846320" y="3700052"/>
             <a:ext cx="3703320" cy="310896"/>
           </a:xfrm>
           <a:prstGeom prst="rect">
@@ -5411,7 +5411,7 @@
         </p:nvSpPr>
         <p:spPr>
           <a:xfrm>
-            <a:off x="4846320" y="3584448"/>
+            <a:off x="4846320" y="4010948"/>
             <a:ext cx="3657600" cy="347472"/>
           </a:xfrm>
           <a:prstGeom prst="rect">
@@ -5421,7 +5421,7 @@
           <a:ln/>
         </p:spPr>
         <p:txBody>
-          <a:bodyPr wrap="square" lIns="0" tIns="0" rIns="0" bIns="0" rtlCol="0" anchor="ctr"/>
+          <a:bodyPr anchor="t" wrap="square" lIns="0" tIns="0" rIns="0" bIns="0" rtlCol="0"/>
           <a:lstStyle/>
           <a:p>
             <a:pPr indent="0" marL="0">
@@ -7937,7 +7937,7 @@
                 <a:ea typeface="Inter" pitchFamily="34" charset="-122"/>
                 <a:cs typeface="Inter" pitchFamily="34" charset="-120"/>
               </a:rPr>
-              <a:t>Same hours, fewer contracted days, shorter closers, more full weekends off, more colleagues.</a:t>
+              <a:t>Same hours, fewer contracted days, shorter closers, more full weekends off.</a:t>
             </a:r>
             <a:endParaRPr lang="en-US" sz="1400" dirty="0"/>
           </a:p>
@@ -9129,7 +9129,7 @@
                 <a:ea typeface="Inter" pitchFamily="34" charset="-122"/>
                 <a:cs typeface="Inter" pitchFamily="34" charset="-120"/>
               </a:rPr>
-              <a:t>Same hours, shorter closing shifts, more full weekends off — and half the times already familiar.</a:t>
+              <a:t>Same hours, shorter closers, more full weekends off — and half the times familiar.</a:t>
             </a:r>
             <a:endParaRPr lang="en-US" sz="1400" dirty="0"/>
           </a:p>
@@ -9419,7 +9419,7 @@
         </p:nvSpPr>
         <p:spPr>
           <a:xfrm>
-            <a:off x="457200" y="2029968"/>
+            <a:off x="457200" y="2233968"/>
             <a:ext cx="457200" cy="457200"/>
           </a:xfrm>
           <a:prstGeom prst="ellipse">
@@ -9452,7 +9452,7 @@
         </p:blipFill>
         <p:spPr>
           <a:xfrm>
-            <a:off x="557784" y="2130552"/>
+            <a:off x="557784" y="2334552"/>
             <a:ext cx="256032" cy="256032"/>
           </a:xfrm>
           <a:prstGeom prst="rect">
@@ -9468,7 +9468,7 @@
         </p:nvSpPr>
         <p:spPr>
           <a:xfrm>
-            <a:off x="1097280" y="1993392"/>
+            <a:off x="1097280" y="2197392"/>
             <a:ext cx="7589520" cy="292608"/>
           </a:xfrm>
           <a:prstGeom prst="rect">
@@ -9507,7 +9507,7 @@
         </p:nvSpPr>
         <p:spPr>
           <a:xfrm>
-            <a:off x="1097280" y="2276856"/>
+            <a:off x="1097280" y="2480856"/>
             <a:ext cx="7589520" cy="274320"/>
           </a:xfrm>
           <a:prstGeom prst="rect">
@@ -9546,7 +9546,7 @@
         </p:nvSpPr>
         <p:spPr>
           <a:xfrm>
-            <a:off x="457200" y="2688336"/>
+            <a:off x="457200" y="3096336"/>
             <a:ext cx="457200" cy="457200"/>
           </a:xfrm>
           <a:prstGeom prst="ellipse">
@@ -9579,7 +9579,7 @@
         </p:blipFill>
         <p:spPr>
           <a:xfrm>
-            <a:off x="557784" y="2788920"/>
+            <a:off x="557784" y="3196920"/>
             <a:ext cx="256032" cy="256032"/>
           </a:xfrm>
           <a:prstGeom prst="rect">
@@ -9595,7 +9595,7 @@
         </p:nvSpPr>
         <p:spPr>
           <a:xfrm>
-            <a:off x="1097280" y="2651760"/>
+            <a:off x="1097280" y="3059760"/>
             <a:ext cx="7589520" cy="292608"/>
           </a:xfrm>
           <a:prstGeom prst="rect">
@@ -9634,7 +9634,7 @@
         </p:nvSpPr>
         <p:spPr>
           <a:xfrm>
-            <a:off x="1097280" y="2935224"/>
+            <a:off x="1097280" y="3343224"/>
             <a:ext cx="7589520" cy="274320"/>
           </a:xfrm>
           <a:prstGeom prst="rect">
@@ -9673,7 +9673,7 @@
         </p:nvSpPr>
         <p:spPr>
           <a:xfrm>
-            <a:off x="457200" y="3346704"/>
+            <a:off x="457200" y="3958704"/>
             <a:ext cx="457200" cy="457200"/>
           </a:xfrm>
           <a:prstGeom prst="ellipse">
@@ -9706,7 +9706,7 @@
         </p:blipFill>
         <p:spPr>
           <a:xfrm>
-            <a:off x="557784" y="3447288"/>
+            <a:off x="557784" y="4059288"/>
             <a:ext cx="256032" cy="256032"/>
           </a:xfrm>
           <a:prstGeom prst="rect">
@@ -9722,7 +9722,7 @@
         </p:nvSpPr>
         <p:spPr>
           <a:xfrm>
-            <a:off x="1097280" y="3310128"/>
+            <a:off x="1097280" y="3922128"/>
             <a:ext cx="7589520" cy="292608"/>
           </a:xfrm>
           <a:prstGeom prst="rect">
@@ -9761,7 +9761,7 @@
         </p:nvSpPr>
         <p:spPr>
           <a:xfrm>
-            <a:off x="1097280" y="3593592"/>
+            <a:off x="1097280" y="4205592"/>
             <a:ext cx="7589520" cy="274320"/>
           </a:xfrm>
           <a:prstGeom prst="rect">
@@ -13157,7 +13157,7 @@
                 <a:ea typeface="Inter" pitchFamily="34" charset="-122"/>
                 <a:cs typeface="Inter" pitchFamily="34" charset="-120"/>
               </a:rPr>
-              <a:t>More late finishes, only partly from the December rules — but every closing shift is shorter.</a:t>
+              <a:t>More late finishes, only partly from the rules — but every closing shift is shorter.</a:t>
             </a:r>
             <a:endParaRPr lang="en-US" sz="1400" dirty="0"/>
           </a:p>

--- a/docs/proposals/presentations/Familiar-Nine-for-colleagues.pptx
+++ b/docs/proposals/presentations/Familiar-Nine-for-colleagues.pptx
@@ -692,7 +692,7 @@
           <a:p>
             <a:r>
               <a:rPr lang="en-US" dirty="0"/>
-              <a:t>Leave is only needed on working days Monday to Saturday; rest days and Sundays cost nothing. Today there is one unusual stretch of the roster where 14 days buys 30 days off — Familiar Nine spreads rest days more evenly, so its best is 28. On average it is about the same, and at its worst it is never worse than today. Four full weeks off (Sunday to Saturday) takes 15 days of leave instead of 14. The exact averages depend on where you count a booking as starting, so quote them as “about the same”.</a:t>
+              <a:t>Leave is only needed on working days Monday to Saturday; rest days and Sundays cost nothing. Today there is one unusual stretch of the roster where 14 days buys 30 days off — Familiar Nine spreads rest days more evenly, so its best is 28. On average it is about the same, and at its worst it is never worse than today. Four full weeks off (Sunday to Saturday) takes at least 15 days of leave, instead of 14 at best today. The exact averages depend on where you count a booking as starting, so quote them as “about the same”.</a:t>
             </a:r>
             <a:endParaRPr lang="en-US" dirty="0"/>
           </a:p>
@@ -780,7 +780,7 @@
           <a:p>
             <a:r>
               <a:rPr lang="en-US" dirty="0"/>
-              <a:t>The Office of Rail and Road and the rail industry publish lists of rota patterns that tend to tire people. Today’s link shows five of them; Familiar Nine shows none. Two more — early starts and a weekly rotation — come with every weekly link at a 06:20 station, so they are listed on the sheet for information but not counted against any design.</a:t>
+              <a:t>The Office of Rail and Road and the rail industry publish lists of rota patterns that tend to tire people. Today’s link shows four of them in the fixed rota (up to five where a cover week falls badly); Familiar Nine shows none. Two more — early starts and a weekly rotation — come with every weekly link at a 06:20 station, so they are listed on the sheet for information but not counted against any design.</a:t>
             </a:r>
             <a:endParaRPr lang="en-US" dirty="0"/>
           </a:p>
@@ -1132,7 +1132,7 @@
           <a:p>
             <a:r>
               <a:rPr lang="en-US" dirty="0"/>
-              <a:t>This is the whole pitch on one slide. Same 35-hour week as now. Never more than six days in a row. One full weekend off in every four weeks, against one in five today. Eight of the sixteen shift times are ones people already work. And every closing shift is shorter: the weekday and Saturday closers by 30 minutes, the Sunday closer by 45.</a:t>
+              <a:t>This is the whole pitch on one slide. Same 35-hour week as now. Never more than six days in a row. One full weekend off in every four weeks, against one in five today — though each person works about four more Saturdays a year. Eight of the sixteen shift times are ones people already work. And every closing shift is shorter: the weekday and Saturday closers by 30 minutes, the Sunday closer by 45.</a:t>
             </a:r>
             <a:endParaRPr lang="en-US" dirty="0"/>
           </a:p>
@@ -1220,7 +1220,7 @@
           <a:p>
             <a:r>
               <a:rPr lang="en-US" dirty="0"/>
-              <a:t>The change is coming whatever we do: the December 2026 timetable and the new staffing levels mean the link has to be redrawn. The question is which version we want. The staffing levels, the 24 people and the Sunday cover are confirmed: nine rules the proposal is scored on. Fourteen on a Saturday is one of three flexible aims, worked towards but not scored.</a:t>
+              <a:t>The change is coming whatever we do: the December 2026 timetable and the new staffing levels mean the link has to be redrawn. The question is which version we want. The staffing levels, the 24 people and the Sunday cover were confirmed verbally on 29 September 2026: nine rules the proposal is scored on. Fourteen on a Saturday is one of three flexible aims, worked towards but not scored.</a:t>
             </a:r>
             <a:endParaRPr lang="en-US" dirty="0"/>
           </a:p>
@@ -1572,7 +1572,7 @@
           <a:p>
             <a:r>
               <a:rPr lang="en-US" dirty="0"/>
-              <a:t>Be straight about this one — it is the change people will notice most. December needs three on duty to the close and five still on at 22:00, where today’s weekdays have two and four, so more late finishes have to go somewhere. Spread over 24 people that is about 20 more a year each finishing at 23:00 or later. Early 06:20 starts hardly change. And because the shortest gap between two shifts is 14h 20m, nobody finishes late and starts early the next morning.</a:t>
+              <a:t>Be straight about this one — it is the change people will notice most. About 20 more a year each finish at 23:00 or later. Only part of that is the December rules: three on duty to the close every day, where today’s weekdays have two, adds about six or seven a year each once it is spread over 24 people. The rest comes from how this design places its late shifts, not from the rules, so it is a fair question to ask. Early 06:20 starts hardly change. And because the shortest gap between two shifts is 14h 20m, nobody finishes late and starts early the next morning.</a:t>
             </a:r>
             <a:endParaRPr lang="en-US" dirty="0"/>
           </a:p>
@@ -2853,7 +2853,7 @@
                 <a:ea typeface="Inter" pitchFamily="34" charset="-122"/>
                 <a:cs typeface="Inter" pitchFamily="34" charset="-120"/>
               </a:rPr>
-              <a:t>The Sunday finish stays where it is. That is agreed practice and will remain so.</a:t>
+              <a:t>The Sunday finish stays where it is. That is agreed practice (settled 28 Sep 2026).</a:t>
             </a:r>
             <a:endParaRPr lang="en-US" sz="1300" dirty="0"/>
           </a:p>
@@ -3644,7 +3644,7 @@
                 <a:ea typeface="Inter" pitchFamily="34" charset="-122"/>
                 <a:cs typeface="Inter" pitchFamily="34" charset="-120"/>
               </a:rPr>
-              <a:t>Leave needed for four full weeks off</a:t>
+              <a:t>Leave for four full weeks off, at best</a:t>
             </a:r>
             <a:endParaRPr lang="en-US" sz="1400" dirty="0"/>
           </a:p>
@@ -3788,7 +3788,7 @@
                 <a:ea typeface="Inter" pitchFamily="34" charset="-122"/>
                 <a:cs typeface="Inter" pitchFamily="34" charset="-120"/>
               </a:rPr>
-              <a:t>About the same. A cover week still counts as 4 days of leave, exactly as now.</a:t>
+              <a:t>About the same. A cover week still counts as at most 4 days of leave, as now.</a:t>
             </a:r>
             <a:endParaRPr lang="en-US" sz="1400" dirty="0"/>
           </a:p>
@@ -3937,7 +3937,7 @@
                 <a:ea typeface="Inter" pitchFamily="34" charset="-122"/>
                 <a:cs typeface="Inter" pitchFamily="34" charset="-120"/>
               </a:rPr>
-              <a:t>More people on duty with you, all day</a:t>
+              <a:t>More people rostered every day, at the open and the close</a:t>
             </a:r>
             <a:endParaRPr lang="en-US" sz="1500" dirty="0"/>
           </a:p>
@@ -4369,7 +4369,7 @@
                 <a:ea typeface="Inter" pitchFamily="34" charset="-122"/>
                 <a:cs typeface="Inter" pitchFamily="34" charset="-120"/>
               </a:rPr>
-              <a:t>Fewest ever on the station floor</a:t>
+              <a:t>Fewest rostered on the floor</a:t>
             </a:r>
             <a:endParaRPr lang="en-US" sz="1400" dirty="0"/>
           </a:p>
@@ -4552,7 +4552,7 @@
                 <a:ea typeface="Inter" pitchFamily="34" charset="-122"/>
                 <a:cs typeface="Inter" pitchFamily="34" charset="-120"/>
               </a:rPr>
-              <a:t>5</a:t>
+              <a:t>4 (up to 5)</a:t>
             </a:r>
             <a:endParaRPr lang="en-US" sz="1600" dirty="0"/>
           </a:p>
@@ -4657,7 +4657,7 @@
                 <a:ea typeface="Inter" pitchFamily="34" charset="-122"/>
                 <a:cs typeface="Inter" pitchFamily="34" charset="-120"/>
               </a:rPr>
-              <a:t>Never fewer than three on the floor, and no avoidable fatigue warnings in the fixed rota.</a:t>
+              <a:t>At least three rostered on the floor, and no avoidable fatigue warnings in the fixed rota.</a:t>
             </a:r>
             <a:endParaRPr lang="en-US" sz="1400" dirty="0"/>
           </a:p>
@@ -4821,7 +4821,7 @@
         <p:spPr>
           <a:xfrm>
             <a:off x="457200" y="1371600"/>
-            <a:ext cx="4023360" cy="804672"/>
+            <a:ext cx="4023360" cy="975272"/>
           </a:xfrm>
           <a:prstGeom prst="roundRect">
             <a:avLst>
@@ -4847,7 +4847,7 @@
         </p:nvSpPr>
         <p:spPr>
           <a:xfrm>
-            <a:off x="640080" y="1444752"/>
+            <a:off x="640080" y="1530052"/>
             <a:ext cx="3703320" cy="310896"/>
           </a:xfrm>
           <a:prstGeom prst="rect">
@@ -4886,7 +4886,7 @@
         </p:nvSpPr>
         <p:spPr>
           <a:xfrm>
-            <a:off x="640080" y="1755648"/>
+            <a:off x="640080" y="1840948"/>
             <a:ext cx="3657600" cy="347472"/>
           </a:xfrm>
           <a:prstGeom prst="rect">
@@ -4896,7 +4896,7 @@
           <a:ln/>
         </p:spPr>
         <p:txBody>
-          <a:bodyPr wrap="square" lIns="0" tIns="0" rIns="0" bIns="0" rtlCol="0" anchor="ctr"/>
+          <a:bodyPr anchor="t" wrap="square" lIns="0" tIns="0" rIns="0" bIns="0" rtlCol="0"/>
           <a:lstStyle/>
           <a:p>
             <a:pPr indent="0" marL="0">
@@ -4926,7 +4926,7 @@
         <p:spPr>
           <a:xfrm>
             <a:off x="4663440" y="1371600"/>
-            <a:ext cx="4023360" cy="804672"/>
+            <a:ext cx="4023360" cy="975272"/>
           </a:xfrm>
           <a:prstGeom prst="roundRect">
             <a:avLst>
@@ -4952,7 +4952,7 @@
         </p:nvSpPr>
         <p:spPr>
           <a:xfrm>
-            <a:off x="4846320" y="1444752"/>
+            <a:off x="4846320" y="1530052"/>
             <a:ext cx="3703320" cy="310896"/>
           </a:xfrm>
           <a:prstGeom prst="rect">
@@ -4991,7 +4991,7 @@
         </p:nvSpPr>
         <p:spPr>
           <a:xfrm>
-            <a:off x="4846320" y="1755648"/>
+            <a:off x="4846320" y="1840948"/>
             <a:ext cx="3657600" cy="347472"/>
           </a:xfrm>
           <a:prstGeom prst="rect">
@@ -5001,7 +5001,7 @@
           <a:ln/>
         </p:spPr>
         <p:txBody>
-          <a:bodyPr wrap="square" lIns="0" tIns="0" rIns="0" bIns="0" rtlCol="0" anchor="ctr"/>
+          <a:bodyPr anchor="t" wrap="square" lIns="0" tIns="0" rIns="0" bIns="0" rtlCol="0"/>
           <a:lstStyle/>
           <a:p>
             <a:pPr indent="0" marL="0">
@@ -5030,8 +5030,8 @@
         </p:nvSpPr>
         <p:spPr>
           <a:xfrm>
-            <a:off x="457200" y="2286000"/>
-            <a:ext cx="4023360" cy="804672"/>
+            <a:off x="457200" y="2456600"/>
+            <a:ext cx="4023360" cy="975272"/>
           </a:xfrm>
           <a:prstGeom prst="roundRect">
             <a:avLst>
@@ -5057,7 +5057,7 @@
         </p:nvSpPr>
         <p:spPr>
           <a:xfrm>
-            <a:off x="640080" y="2359152"/>
+            <a:off x="640080" y="2615052"/>
             <a:ext cx="3703320" cy="310896"/>
           </a:xfrm>
           <a:prstGeom prst="rect">
@@ -5096,7 +5096,7 @@
         </p:nvSpPr>
         <p:spPr>
           <a:xfrm>
-            <a:off x="640080" y="2670048"/>
+            <a:off x="640080" y="2925948"/>
             <a:ext cx="3657600" cy="347472"/>
           </a:xfrm>
           <a:prstGeom prst="rect">
@@ -5106,7 +5106,7 @@
           <a:ln/>
         </p:spPr>
         <p:txBody>
-          <a:bodyPr wrap="square" lIns="0" tIns="0" rIns="0" bIns="0" rtlCol="0" anchor="ctr"/>
+          <a:bodyPr anchor="t" wrap="square" lIns="0" tIns="0" rIns="0" bIns="0" rtlCol="0"/>
           <a:lstStyle/>
           <a:p>
             <a:pPr indent="0" marL="0">
@@ -5135,8 +5135,8 @@
         </p:nvSpPr>
         <p:spPr>
           <a:xfrm>
-            <a:off x="4663440" y="2286000"/>
-            <a:ext cx="4023360" cy="804672"/>
+            <a:off x="4663440" y="2456600"/>
+            <a:ext cx="4023360" cy="975272"/>
           </a:xfrm>
           <a:prstGeom prst="roundRect">
             <a:avLst>
@@ -5162,7 +5162,7 @@
         </p:nvSpPr>
         <p:spPr>
           <a:xfrm>
-            <a:off x="4846320" y="2359152"/>
+            <a:off x="4846320" y="2615052"/>
             <a:ext cx="3703320" cy="310896"/>
           </a:xfrm>
           <a:prstGeom prst="rect">
@@ -5201,7 +5201,7 @@
         </p:nvSpPr>
         <p:spPr>
           <a:xfrm>
-            <a:off x="4846320" y="2670048"/>
+            <a:off x="4846320" y="2925948"/>
             <a:ext cx="3657600" cy="347472"/>
           </a:xfrm>
           <a:prstGeom prst="rect">
@@ -5211,7 +5211,7 @@
           <a:ln/>
         </p:spPr>
         <p:txBody>
-          <a:bodyPr wrap="square" lIns="0" tIns="0" rIns="0" bIns="0" rtlCol="0" anchor="ctr"/>
+          <a:bodyPr anchor="t" wrap="square" lIns="0" tIns="0" rIns="0" bIns="0" rtlCol="0"/>
           <a:lstStyle/>
           <a:p>
             <a:pPr indent="0" marL="0">
@@ -5240,8 +5240,8 @@
         </p:nvSpPr>
         <p:spPr>
           <a:xfrm>
-            <a:off x="457200" y="3200400"/>
-            <a:ext cx="4023360" cy="804672"/>
+            <a:off x="457200" y="3541600"/>
+            <a:ext cx="4023360" cy="975272"/>
           </a:xfrm>
           <a:prstGeom prst="roundRect">
             <a:avLst>
@@ -5267,7 +5267,7 @@
         </p:nvSpPr>
         <p:spPr>
           <a:xfrm>
-            <a:off x="640080" y="3273552"/>
+            <a:off x="640080" y="3700052"/>
             <a:ext cx="3703320" cy="310896"/>
           </a:xfrm>
           <a:prstGeom prst="rect">
@@ -5306,7 +5306,7 @@
         </p:nvSpPr>
         <p:spPr>
           <a:xfrm>
-            <a:off x="640080" y="3584448"/>
+            <a:off x="640080" y="4010948"/>
             <a:ext cx="3657600" cy="347472"/>
           </a:xfrm>
           <a:prstGeom prst="rect">
@@ -5316,7 +5316,7 @@
           <a:ln/>
         </p:spPr>
         <p:txBody>
-          <a:bodyPr wrap="square" lIns="0" tIns="0" rIns="0" bIns="0" rtlCol="0" anchor="ctr"/>
+          <a:bodyPr anchor="t" wrap="square" lIns="0" tIns="0" rIns="0" bIns="0" rtlCol="0"/>
           <a:lstStyle/>
           <a:p>
             <a:pPr indent="0" marL="0">
@@ -5331,7 +5331,7 @@
                 <a:ea typeface="Inter" pitchFamily="34" charset="-122"/>
                 <a:cs typeface="Inter" pitchFamily="34" charset="-120"/>
               </a:rPr>
-              <a:t>About 59 a year each at 23:00 or later, against 39 today.</a:t>
+              <a:t>About 59 a year each at 23:00 or later on the fixed rota, against 39 today.</a:t>
             </a:r>
             <a:endParaRPr lang="en-US" sz="1250" dirty="0"/>
           </a:p>
@@ -5345,8 +5345,8 @@
         </p:nvSpPr>
         <p:spPr>
           <a:xfrm>
-            <a:off x="4663440" y="3200400"/>
-            <a:ext cx="4023360" cy="804672"/>
+            <a:off x="4663440" y="3541600"/>
+            <a:ext cx="4023360" cy="975272"/>
           </a:xfrm>
           <a:prstGeom prst="roundRect">
             <a:avLst>
@@ -5372,7 +5372,7 @@
         </p:nvSpPr>
         <p:spPr>
           <a:xfrm>
-            <a:off x="4846320" y="3273552"/>
+            <a:off x="4846320" y="3700052"/>
             <a:ext cx="3703320" cy="310896"/>
           </a:xfrm>
           <a:prstGeom prst="rect">
@@ -5411,7 +5411,7 @@
         </p:nvSpPr>
         <p:spPr>
           <a:xfrm>
-            <a:off x="4846320" y="3584448"/>
+            <a:off x="4846320" y="4010948"/>
             <a:ext cx="3657600" cy="347472"/>
           </a:xfrm>
           <a:prstGeom prst="rect">
@@ -5421,7 +5421,7 @@
           <a:ln/>
         </p:spPr>
         <p:txBody>
-          <a:bodyPr wrap="square" lIns="0" tIns="0" rIns="0" bIns="0" rtlCol="0" anchor="ctr"/>
+          <a:bodyPr anchor="t" wrap="square" lIns="0" tIns="0" rIns="0" bIns="0" rtlCol="0"/>
           <a:lstStyle/>
           <a:p>
             <a:pPr indent="0" marL="0">
@@ -6929,7 +6929,7 @@
                           <a:ea typeface="Inter" pitchFamily="34" charset="-122"/>
                           <a:cs typeface="Inter" pitchFamily="34" charset="-120"/>
                         </a:rPr>
-                        <a:t>9</a:t>
+                        <a:t>7 (up to 9)</a:t>
                       </a:r>
                       <a:endParaRPr lang="en-US" sz="1200" dirty="0">
                         <a:latin typeface="Inter" charset="0"/>
@@ -7753,7 +7753,7 @@
                           <a:ea typeface="Inter" pitchFamily="34" charset="-122"/>
                           <a:cs typeface="Inter" pitchFamily="34" charset="-120"/>
                         </a:rPr>
-                        <a:t>5</a:t>
+                        <a:t>4 (up to 5)</a:t>
                       </a:r>
                       <a:endParaRPr lang="en-US" sz="1200" dirty="0">
                         <a:latin typeface="Inter" charset="0"/>
@@ -7937,7 +7937,7 @@
                 <a:ea typeface="Inter" pitchFamily="34" charset="-122"/>
                 <a:cs typeface="Inter" pitchFamily="34" charset="-120"/>
               </a:rPr>
-              <a:t>Same hours, fewer contracted days, shorter closers, more weekends, more colleagues.</a:t>
+              <a:t>Same hours, fewer contracted days, shorter closers, more full weekends off.</a:t>
             </a:r>
             <a:endParaRPr lang="en-US" sz="1400" dirty="0"/>
           </a:p>
@@ -8479,7 +8479,7 @@
                 <a:ea typeface="Inter" pitchFamily="34" charset="-122"/>
                 <a:cs typeface="Inter" pitchFamily="34" charset="-120"/>
               </a:rPr>
-              <a:t>no extra hours</a:t>
+              <a:t>no extra contracted hours</a:t>
             </a:r>
             <a:endParaRPr lang="en-US" sz="1200" dirty="0"/>
           </a:p>
@@ -8625,7 +8625,7 @@
                 <a:ea typeface="Inter" pitchFamily="34" charset="-122"/>
                 <a:cs typeface="Inter" pitchFamily="34" charset="-120"/>
               </a:rPr>
-              <a:t>today it can be 9</a:t>
+              <a:t>today 7, up to 9</a:t>
             </a:r>
             <a:endParaRPr lang="en-US" sz="1200" dirty="0"/>
           </a:p>
@@ -9129,7 +9129,7 @@
                 <a:ea typeface="Inter" pitchFamily="34" charset="-122"/>
                 <a:cs typeface="Inter" pitchFamily="34" charset="-120"/>
               </a:rPr>
-              <a:t>Same hours, shorter closing shifts, more weekends — and half the times already familiar.</a:t>
+              <a:t>Same hours, shorter closers, more full weekends off — and half the times familiar.</a:t>
             </a:r>
             <a:endParaRPr lang="en-US" sz="1400" dirty="0"/>
           </a:p>
@@ -9419,7 +9419,7 @@
         </p:nvSpPr>
         <p:spPr>
           <a:xfrm>
-            <a:off x="457200" y="2029968"/>
+            <a:off x="457200" y="2233968"/>
             <a:ext cx="457200" cy="457200"/>
           </a:xfrm>
           <a:prstGeom prst="ellipse">
@@ -9452,7 +9452,7 @@
         </p:blipFill>
         <p:spPr>
           <a:xfrm>
-            <a:off x="557784" y="2130552"/>
+            <a:off x="557784" y="2334552"/>
             <a:ext cx="256032" cy="256032"/>
           </a:xfrm>
           <a:prstGeom prst="rect">
@@ -9468,7 +9468,7 @@
         </p:nvSpPr>
         <p:spPr>
           <a:xfrm>
-            <a:off x="1097280" y="1993392"/>
+            <a:off x="1097280" y="2197392"/>
             <a:ext cx="7589520" cy="292608"/>
           </a:xfrm>
           <a:prstGeom prst="rect">
@@ -9507,7 +9507,7 @@
         </p:nvSpPr>
         <p:spPr>
           <a:xfrm>
-            <a:off x="1097280" y="2276856"/>
+            <a:off x="1097280" y="2480856"/>
             <a:ext cx="7589520" cy="274320"/>
           </a:xfrm>
           <a:prstGeom prst="rect">
@@ -9546,7 +9546,7 @@
         </p:nvSpPr>
         <p:spPr>
           <a:xfrm>
-            <a:off x="457200" y="2688336"/>
+            <a:off x="457200" y="3096336"/>
             <a:ext cx="457200" cy="457200"/>
           </a:xfrm>
           <a:prstGeom prst="ellipse">
@@ -9579,7 +9579,7 @@
         </p:blipFill>
         <p:spPr>
           <a:xfrm>
-            <a:off x="557784" y="2788920"/>
+            <a:off x="557784" y="3196920"/>
             <a:ext cx="256032" cy="256032"/>
           </a:xfrm>
           <a:prstGeom prst="rect">
@@ -9595,7 +9595,7 @@
         </p:nvSpPr>
         <p:spPr>
           <a:xfrm>
-            <a:off x="1097280" y="2651760"/>
+            <a:off x="1097280" y="3059760"/>
             <a:ext cx="7589520" cy="292608"/>
           </a:xfrm>
           <a:prstGeom prst="rect">
@@ -9634,7 +9634,7 @@
         </p:nvSpPr>
         <p:spPr>
           <a:xfrm>
-            <a:off x="1097280" y="2935224"/>
+            <a:off x="1097280" y="3343224"/>
             <a:ext cx="7589520" cy="274320"/>
           </a:xfrm>
           <a:prstGeom prst="rect">
@@ -9673,7 +9673,7 @@
         </p:nvSpPr>
         <p:spPr>
           <a:xfrm>
-            <a:off x="457200" y="3346704"/>
+            <a:off x="457200" y="3958704"/>
             <a:ext cx="457200" cy="457200"/>
           </a:xfrm>
           <a:prstGeom prst="ellipse">
@@ -9706,7 +9706,7 @@
         </p:blipFill>
         <p:spPr>
           <a:xfrm>
-            <a:off x="557784" y="3447288"/>
+            <a:off x="557784" y="4059288"/>
             <a:ext cx="256032" cy="256032"/>
           </a:xfrm>
           <a:prstGeom prst="rect">
@@ -9722,7 +9722,7 @@
         </p:nvSpPr>
         <p:spPr>
           <a:xfrm>
-            <a:off x="1097280" y="3310128"/>
+            <a:off x="1097280" y="3922128"/>
             <a:ext cx="7589520" cy="292608"/>
           </a:xfrm>
           <a:prstGeom prst="rect">
@@ -9761,7 +9761,7 @@
         </p:nvSpPr>
         <p:spPr>
           <a:xfrm>
-            <a:off x="1097280" y="3593592"/>
+            <a:off x="1097280" y="4205592"/>
             <a:ext cx="7589520" cy="274320"/>
           </a:xfrm>
           <a:prstGeom prst="rect">
@@ -13157,7 +13157,7 @@
                 <a:ea typeface="Inter" pitchFamily="34" charset="-122"/>
                 <a:cs typeface="Inter" pitchFamily="34" charset="-120"/>
               </a:rPr>
-              <a:t>December needs more people at the close — but every closing shift is shorter.</a:t>
+              <a:t>More late finishes, only partly from the rules — but every closing shift is shorter.</a:t>
             </a:r>
             <a:endParaRPr lang="en-US" sz="1400" dirty="0"/>
           </a:p>
@@ -14479,7 +14479,7 @@
                 <a:ea typeface="Inter" pitchFamily="34" charset="-122"/>
                 <a:cs typeface="Inter" pitchFamily="34" charset="-120"/>
               </a:rPr>
-              <a:t>9</a:t>
+              <a:t>7 (up to 9)</a:t>
             </a:r>
             <a:endParaRPr lang="en-US" sz="1600" dirty="0"/>
           </a:p>
